--- a/docs/pptx/carbo/ritu-carbo-linsubhr-ratio-throm2_10pct.pptx
+++ b/docs/pptx/carbo/ritu-carbo-linsubhr-ratio-throm2_10pct.pptx
@@ -2443,7 +2443,7 @@
           </p:nvSpPr>
           <p:spPr>
             <a:xfrm>
-              <a:off x="973953" y="2073503"/>
+              <a:off x="974732" y="2073503"/>
               <a:ext cx="0" cy="3649639"/>
             </a:xfrm>
             <a:custGeom>
@@ -2486,7 +2486,7 @@
           </p:nvSpPr>
           <p:spPr>
             <a:xfrm>
-              <a:off x="1881787" y="2073503"/>
+              <a:off x="1882345" y="2073503"/>
               <a:ext cx="0" cy="3649639"/>
             </a:xfrm>
             <a:custGeom>
@@ -2529,7 +2529,7 @@
           </p:nvSpPr>
           <p:spPr>
             <a:xfrm>
-              <a:off x="2789620" y="2073503"/>
+              <a:off x="2789957" y="2073503"/>
               <a:ext cx="0" cy="3649639"/>
             </a:xfrm>
             <a:custGeom>
@@ -2572,7 +2572,7 @@
           </p:nvSpPr>
           <p:spPr>
             <a:xfrm>
-              <a:off x="3697454" y="2073503"/>
+              <a:off x="3697570" y="2073503"/>
               <a:ext cx="0" cy="3649639"/>
             </a:xfrm>
             <a:custGeom>
@@ -2615,7 +2615,7 @@
           </p:nvSpPr>
           <p:spPr>
             <a:xfrm>
-              <a:off x="4605287" y="2073503"/>
+              <a:off x="4605182" y="2073503"/>
               <a:ext cx="0" cy="3649639"/>
             </a:xfrm>
             <a:custGeom>
@@ -2658,7 +2658,7 @@
           </p:nvSpPr>
           <p:spPr>
             <a:xfrm>
-              <a:off x="5513120" y="2073503"/>
+              <a:off x="5512795" y="2073503"/>
               <a:ext cx="0" cy="3649639"/>
             </a:xfrm>
             <a:custGeom>
@@ -2701,7 +2701,7 @@
           </p:nvSpPr>
           <p:spPr>
             <a:xfrm>
-              <a:off x="6420954" y="2073503"/>
+              <a:off x="6420407" y="2073503"/>
               <a:ext cx="0" cy="3649639"/>
             </a:xfrm>
             <a:custGeom>
@@ -2744,7 +2744,7 @@
           </p:nvSpPr>
           <p:spPr>
             <a:xfrm>
-              <a:off x="7328787" y="2073503"/>
+              <a:off x="7328020" y="2073503"/>
               <a:ext cx="0" cy="3649639"/>
             </a:xfrm>
             <a:custGeom>
@@ -2787,7 +2787,7 @@
           </p:nvSpPr>
           <p:spPr>
             <a:xfrm>
-              <a:off x="8236620" y="2073503"/>
+              <a:off x="8235632" y="2073503"/>
               <a:ext cx="0" cy="3649639"/>
             </a:xfrm>
             <a:custGeom>
@@ -3045,7 +3045,7 @@
           </p:nvSpPr>
           <p:spPr>
             <a:xfrm>
-              <a:off x="1427870" y="2073503"/>
+              <a:off x="1428538" y="2073503"/>
               <a:ext cx="0" cy="3649639"/>
             </a:xfrm>
             <a:custGeom>
@@ -3088,7 +3088,7 @@
           </p:nvSpPr>
           <p:spPr>
             <a:xfrm>
-              <a:off x="2335703" y="2073503"/>
+              <a:off x="2336151" y="2073503"/>
               <a:ext cx="0" cy="3649639"/>
             </a:xfrm>
             <a:custGeom>
@@ -3131,7 +3131,7 @@
           </p:nvSpPr>
           <p:spPr>
             <a:xfrm>
-              <a:off x="3243537" y="2073503"/>
+              <a:off x="3243764" y="2073503"/>
               <a:ext cx="0" cy="3649639"/>
             </a:xfrm>
             <a:custGeom>
@@ -3174,7 +3174,7 @@
           </p:nvSpPr>
           <p:spPr>
             <a:xfrm>
-              <a:off x="4151370" y="2073503"/>
+              <a:off x="4151376" y="2073503"/>
               <a:ext cx="0" cy="3649639"/>
             </a:xfrm>
             <a:custGeom>
@@ -3217,7 +3217,7 @@
           </p:nvSpPr>
           <p:spPr>
             <a:xfrm>
-              <a:off x="5059204" y="2073503"/>
+              <a:off x="5058989" y="2073503"/>
               <a:ext cx="0" cy="3649639"/>
             </a:xfrm>
             <a:custGeom>
@@ -3260,7 +3260,7 @@
           </p:nvSpPr>
           <p:spPr>
             <a:xfrm>
-              <a:off x="5967037" y="2073503"/>
+              <a:off x="5966601" y="2073503"/>
               <a:ext cx="0" cy="3649639"/>
             </a:xfrm>
             <a:custGeom>
@@ -3303,7 +3303,7 @@
           </p:nvSpPr>
           <p:spPr>
             <a:xfrm>
-              <a:off x="6874870" y="2073503"/>
+              <a:off x="6874214" y="2073503"/>
               <a:ext cx="0" cy="3649639"/>
             </a:xfrm>
             <a:custGeom>
@@ -3346,7 +3346,7 @@
           </p:nvSpPr>
           <p:spPr>
             <a:xfrm>
-              <a:off x="7782704" y="2073503"/>
+              <a:off x="7781826" y="2073503"/>
               <a:ext cx="0" cy="3649639"/>
             </a:xfrm>
             <a:custGeom>
@@ -3390,539 +3390,539 @@
           <p:spPr>
             <a:xfrm>
               <a:off x="1172049" y="2073503"/>
-              <a:ext cx="7090630" cy="3469463"/>
+              <a:ext cx="7090630" cy="3469120"/>
             </a:xfrm>
             <a:custGeom>
               <a:avLst/>
               <a:pathLst>
-                <a:path w="7090630" h="3469463">
+                <a:path w="7090630" h="3469120">
                   <a:moveTo>
-                    <a:pt x="1666593" y="0"/>
+                    <a:pt x="1691401" y="0"/>
                   </a:moveTo>
                   <a:lnTo>
-                    <a:pt x="1718940" y="181667"/>
-                  </a:lnTo>
-                  <a:lnTo>
-                    <a:pt x="1790563" y="412828"/>
-                  </a:lnTo>
-                  <a:lnTo>
-                    <a:pt x="1862185" y="627807"/>
-                  </a:lnTo>
-                  <a:lnTo>
-                    <a:pt x="1933808" y="827736"/>
-                  </a:lnTo>
-                  <a:lnTo>
-                    <a:pt x="2005430" y="1013670"/>
-                  </a:lnTo>
-                  <a:lnTo>
-                    <a:pt x="2077053" y="1186587"/>
-                  </a:lnTo>
-                  <a:lnTo>
-                    <a:pt x="2148675" y="1347399"/>
-                  </a:lnTo>
-                  <a:lnTo>
-                    <a:pt x="2220298" y="1496953"/>
-                  </a:lnTo>
-                  <a:lnTo>
-                    <a:pt x="2291920" y="1636038"/>
-                  </a:lnTo>
-                  <a:lnTo>
-                    <a:pt x="2363543" y="1765387"/>
-                  </a:lnTo>
-                  <a:lnTo>
-                    <a:pt x="2435165" y="1885680"/>
-                  </a:lnTo>
-                  <a:lnTo>
-                    <a:pt x="2506788" y="1997552"/>
-                  </a:lnTo>
-                  <a:lnTo>
-                    <a:pt x="2578410" y="2101593"/>
-                  </a:lnTo>
-                  <a:lnTo>
-                    <a:pt x="2650033" y="2198350"/>
-                  </a:lnTo>
-                  <a:lnTo>
-                    <a:pt x="2721655" y="2288334"/>
-                  </a:lnTo>
-                  <a:lnTo>
-                    <a:pt x="2793278" y="2372019"/>
-                  </a:lnTo>
-                  <a:lnTo>
-                    <a:pt x="2864901" y="2449845"/>
-                  </a:lnTo>
-                  <a:lnTo>
-                    <a:pt x="2936523" y="2522223"/>
-                  </a:lnTo>
-                  <a:lnTo>
-                    <a:pt x="3008146" y="2589534"/>
-                  </a:lnTo>
-                  <a:lnTo>
-                    <a:pt x="3079768" y="2652133"/>
-                  </a:lnTo>
-                  <a:lnTo>
-                    <a:pt x="3151391" y="2632555"/>
-                  </a:lnTo>
-                  <a:lnTo>
-                    <a:pt x="3223013" y="2609421"/>
-                  </a:lnTo>
-                  <a:lnTo>
-                    <a:pt x="3294636" y="2585660"/>
-                  </a:lnTo>
-                  <a:lnTo>
-                    <a:pt x="3366258" y="2561252"/>
-                  </a:lnTo>
-                  <a:lnTo>
-                    <a:pt x="3437881" y="2536181"/>
-                  </a:lnTo>
-                  <a:lnTo>
-                    <a:pt x="3509503" y="2510428"/>
-                  </a:lnTo>
-                  <a:lnTo>
-                    <a:pt x="3581126" y="2483976"/>
-                  </a:lnTo>
-                  <a:lnTo>
-                    <a:pt x="3652748" y="2456805"/>
-                  </a:lnTo>
-                  <a:lnTo>
-                    <a:pt x="3724371" y="2428896"/>
-                  </a:lnTo>
-                  <a:lnTo>
-                    <a:pt x="3795993" y="2400227"/>
-                  </a:lnTo>
-                  <a:lnTo>
-                    <a:pt x="3867616" y="2370780"/>
-                  </a:lnTo>
-                  <a:lnTo>
-                    <a:pt x="3939238" y="2340533"/>
-                  </a:lnTo>
-                  <a:lnTo>
-                    <a:pt x="4010861" y="2309463"/>
-                  </a:lnTo>
-                  <a:lnTo>
-                    <a:pt x="4082483" y="2277549"/>
-                  </a:lnTo>
-                  <a:lnTo>
-                    <a:pt x="4154106" y="2244768"/>
-                  </a:lnTo>
-                  <a:lnTo>
-                    <a:pt x="4225729" y="2211096"/>
-                  </a:lnTo>
-                  <a:lnTo>
-                    <a:pt x="4297351" y="2176508"/>
-                  </a:lnTo>
-                  <a:lnTo>
-                    <a:pt x="4368974" y="2140981"/>
-                  </a:lnTo>
-                  <a:lnTo>
-                    <a:pt x="4440596" y="2104488"/>
-                  </a:lnTo>
-                  <a:lnTo>
-                    <a:pt x="4512219" y="2067004"/>
-                  </a:lnTo>
-                  <a:lnTo>
-                    <a:pt x="4583841" y="2028500"/>
-                  </a:lnTo>
-                  <a:lnTo>
-                    <a:pt x="4655464" y="1988950"/>
-                  </a:lnTo>
-                  <a:lnTo>
-                    <a:pt x="4727086" y="1948326"/>
-                  </a:lnTo>
-                  <a:lnTo>
-                    <a:pt x="4798709" y="1906597"/>
-                  </a:lnTo>
-                  <a:lnTo>
-                    <a:pt x="4870331" y="1863734"/>
-                  </a:lnTo>
-                  <a:lnTo>
-                    <a:pt x="4941954" y="1819706"/>
-                  </a:lnTo>
-                  <a:lnTo>
-                    <a:pt x="5013576" y="1774482"/>
-                  </a:lnTo>
-                  <a:lnTo>
-                    <a:pt x="5085199" y="1728029"/>
-                  </a:lnTo>
-                  <a:lnTo>
-                    <a:pt x="5156821" y="1680313"/>
-                  </a:lnTo>
-                  <a:lnTo>
-                    <a:pt x="5228444" y="1631300"/>
-                  </a:lnTo>
-                  <a:lnTo>
-                    <a:pt x="5300066" y="1580956"/>
-                  </a:lnTo>
-                  <a:lnTo>
-                    <a:pt x="5371689" y="1529243"/>
-                  </a:lnTo>
-                  <a:lnTo>
-                    <a:pt x="5443311" y="1476125"/>
-                  </a:lnTo>
-                  <a:lnTo>
-                    <a:pt x="5514934" y="1421563"/>
-                  </a:lnTo>
-                  <a:lnTo>
-                    <a:pt x="5586557" y="1365518"/>
-                  </a:lnTo>
-                  <a:lnTo>
-                    <a:pt x="5658179" y="1307950"/>
-                  </a:lnTo>
-                  <a:lnTo>
-                    <a:pt x="5729802" y="1248817"/>
-                  </a:lnTo>
-                  <a:lnTo>
-                    <a:pt x="5801424" y="1188078"/>
-                  </a:lnTo>
-                  <a:lnTo>
-                    <a:pt x="5873047" y="1125688"/>
-                  </a:lnTo>
-                  <a:lnTo>
-                    <a:pt x="5944669" y="1061602"/>
-                  </a:lnTo>
-                  <a:lnTo>
-                    <a:pt x="6016292" y="995774"/>
-                  </a:lnTo>
-                  <a:lnTo>
-                    <a:pt x="6087914" y="928158"/>
-                  </a:lnTo>
-                  <a:lnTo>
-                    <a:pt x="6159537" y="858703"/>
-                  </a:lnTo>
-                  <a:lnTo>
-                    <a:pt x="6231159" y="787361"/>
-                  </a:lnTo>
-                  <a:lnTo>
-                    <a:pt x="6302782" y="714081"/>
-                  </a:lnTo>
-                  <a:lnTo>
-                    <a:pt x="6374404" y="638808"/>
-                  </a:lnTo>
-                  <a:lnTo>
-                    <a:pt x="6446027" y="561490"/>
-                  </a:lnTo>
-                  <a:lnTo>
-                    <a:pt x="6517649" y="482071"/>
-                  </a:lnTo>
-                  <a:lnTo>
-                    <a:pt x="6589272" y="400494"/>
-                  </a:lnTo>
-                  <a:lnTo>
-                    <a:pt x="6660894" y="316699"/>
-                  </a:lnTo>
-                  <a:lnTo>
-                    <a:pt x="6732517" y="230627"/>
-                  </a:lnTo>
-                  <a:lnTo>
-                    <a:pt x="6804139" y="142215"/>
-                  </a:lnTo>
-                  <a:lnTo>
-                    <a:pt x="6875762" y="51401"/>
-                  </a:lnTo>
-                  <a:lnTo>
-                    <a:pt x="6915229" y="0"/>
+                    <a:pt x="1718940" y="98019"/>
+                  </a:lnTo>
+                  <a:lnTo>
+                    <a:pt x="1790563" y="335091"/>
+                  </a:lnTo>
+                  <a:lnTo>
+                    <a:pt x="1862185" y="555564"/>
+                  </a:lnTo>
+                  <a:lnTo>
+                    <a:pt x="1933808" y="760599"/>
+                  </a:lnTo>
+                  <a:lnTo>
+                    <a:pt x="2005430" y="951277"/>
+                  </a:lnTo>
+                  <a:lnTo>
+                    <a:pt x="2077053" y="1128603"/>
+                  </a:lnTo>
+                  <a:lnTo>
+                    <a:pt x="2148675" y="1293513"/>
+                  </a:lnTo>
+                  <a:lnTo>
+                    <a:pt x="2220298" y="1446876"/>
+                  </a:lnTo>
+                  <a:lnTo>
+                    <a:pt x="2291920" y="1589500"/>
+                  </a:lnTo>
+                  <a:lnTo>
+                    <a:pt x="2363543" y="1722137"/>
+                  </a:lnTo>
+                  <a:lnTo>
+                    <a:pt x="2435165" y="1845487"/>
+                  </a:lnTo>
+                  <a:lnTo>
+                    <a:pt x="2506788" y="1960200"/>
+                  </a:lnTo>
+                  <a:lnTo>
+                    <a:pt x="2578410" y="2066880"/>
+                  </a:lnTo>
+                  <a:lnTo>
+                    <a:pt x="2650033" y="2166091"/>
+                  </a:lnTo>
+                  <a:lnTo>
+                    <a:pt x="2721655" y="2258355"/>
+                  </a:lnTo>
+                  <a:lnTo>
+                    <a:pt x="2793278" y="2344158"/>
+                  </a:lnTo>
+                  <a:lnTo>
+                    <a:pt x="2864901" y="2423953"/>
+                  </a:lnTo>
+                  <a:lnTo>
+                    <a:pt x="2936523" y="2498161"/>
+                  </a:lnTo>
+                  <a:lnTo>
+                    <a:pt x="3008146" y="2567173"/>
+                  </a:lnTo>
+                  <a:lnTo>
+                    <a:pt x="3079768" y="2631353"/>
+                  </a:lnTo>
+                  <a:lnTo>
+                    <a:pt x="3151391" y="2640276"/>
+                  </a:lnTo>
+                  <a:lnTo>
+                    <a:pt x="3223013" y="2617347"/>
+                  </a:lnTo>
+                  <a:lnTo>
+                    <a:pt x="3294636" y="2593795"/>
+                  </a:lnTo>
+                  <a:lnTo>
+                    <a:pt x="3366258" y="2569602"/>
+                  </a:lnTo>
+                  <a:lnTo>
+                    <a:pt x="3437881" y="2544752"/>
+                  </a:lnTo>
+                  <a:lnTo>
+                    <a:pt x="3509503" y="2519226"/>
+                  </a:lnTo>
+                  <a:lnTo>
+                    <a:pt x="3581126" y="2493007"/>
+                  </a:lnTo>
+                  <a:lnTo>
+                    <a:pt x="3652748" y="2466074"/>
+                  </a:lnTo>
+                  <a:lnTo>
+                    <a:pt x="3724371" y="2438410"/>
+                  </a:lnTo>
+                  <a:lnTo>
+                    <a:pt x="3795993" y="2409993"/>
+                  </a:lnTo>
+                  <a:lnTo>
+                    <a:pt x="3867616" y="2380804"/>
+                  </a:lnTo>
+                  <a:lnTo>
+                    <a:pt x="3939238" y="2350822"/>
+                  </a:lnTo>
+                  <a:lnTo>
+                    <a:pt x="4010861" y="2320024"/>
+                  </a:lnTo>
+                  <a:lnTo>
+                    <a:pt x="4082483" y="2288389"/>
+                  </a:lnTo>
+                  <a:lnTo>
+                    <a:pt x="4154106" y="2255895"/>
+                  </a:lnTo>
+                  <a:lnTo>
+                    <a:pt x="4225729" y="2222517"/>
+                  </a:lnTo>
+                  <a:lnTo>
+                    <a:pt x="4297351" y="2188231"/>
+                  </a:lnTo>
+                  <a:lnTo>
+                    <a:pt x="4368974" y="2153014"/>
+                  </a:lnTo>
+                  <a:lnTo>
+                    <a:pt x="4440596" y="2116839"/>
+                  </a:lnTo>
+                  <a:lnTo>
+                    <a:pt x="4512219" y="2079681"/>
+                  </a:lnTo>
+                  <a:lnTo>
+                    <a:pt x="4583841" y="2041513"/>
+                  </a:lnTo>
+                  <a:lnTo>
+                    <a:pt x="4655464" y="2002307"/>
+                  </a:lnTo>
+                  <a:lnTo>
+                    <a:pt x="4727086" y="1962036"/>
+                  </a:lnTo>
+                  <a:lnTo>
+                    <a:pt x="4798709" y="1920669"/>
+                  </a:lnTo>
+                  <a:lnTo>
+                    <a:pt x="4870331" y="1878178"/>
+                  </a:lnTo>
+                  <a:lnTo>
+                    <a:pt x="4941954" y="1834533"/>
+                  </a:lnTo>
+                  <a:lnTo>
+                    <a:pt x="5013576" y="1789700"/>
+                  </a:lnTo>
+                  <a:lnTo>
+                    <a:pt x="5085199" y="1743649"/>
+                  </a:lnTo>
+                  <a:lnTo>
+                    <a:pt x="5156821" y="1696346"/>
+                  </a:lnTo>
+                  <a:lnTo>
+                    <a:pt x="5228444" y="1647757"/>
+                  </a:lnTo>
+                  <a:lnTo>
+                    <a:pt x="5300066" y="1597848"/>
+                  </a:lnTo>
+                  <a:lnTo>
+                    <a:pt x="5371689" y="1546581"/>
+                  </a:lnTo>
+                  <a:lnTo>
+                    <a:pt x="5443311" y="1493921"/>
+                  </a:lnTo>
+                  <a:lnTo>
+                    <a:pt x="5514934" y="1439830"/>
+                  </a:lnTo>
+                  <a:lnTo>
+                    <a:pt x="5586557" y="1384268"/>
+                  </a:lnTo>
+                  <a:lnTo>
+                    <a:pt x="5658179" y="1327195"/>
+                  </a:lnTo>
+                  <a:lnTo>
+                    <a:pt x="5729802" y="1268571"/>
+                  </a:lnTo>
+                  <a:lnTo>
+                    <a:pt x="5801424" y="1208354"/>
+                  </a:lnTo>
+                  <a:lnTo>
+                    <a:pt x="5873047" y="1146499"/>
+                  </a:lnTo>
+                  <a:lnTo>
+                    <a:pt x="5944669" y="1082963"/>
+                  </a:lnTo>
+                  <a:lnTo>
+                    <a:pt x="6016292" y="1017700"/>
+                  </a:lnTo>
+                  <a:lnTo>
+                    <a:pt x="6087914" y="950663"/>
+                  </a:lnTo>
+                  <a:lnTo>
+                    <a:pt x="6159537" y="881804"/>
+                  </a:lnTo>
+                  <a:lnTo>
+                    <a:pt x="6231159" y="811072"/>
+                  </a:lnTo>
+                  <a:lnTo>
+                    <a:pt x="6302782" y="738418"/>
+                  </a:lnTo>
+                  <a:lnTo>
+                    <a:pt x="6374404" y="663789"/>
+                  </a:lnTo>
+                  <a:lnTo>
+                    <a:pt x="6446027" y="587131"/>
+                  </a:lnTo>
+                  <a:lnTo>
+                    <a:pt x="6517649" y="508389"/>
+                  </a:lnTo>
+                  <a:lnTo>
+                    <a:pt x="6589272" y="427507"/>
+                  </a:lnTo>
+                  <a:lnTo>
+                    <a:pt x="6660894" y="344426"/>
+                  </a:lnTo>
+                  <a:lnTo>
+                    <a:pt x="6732517" y="259086"/>
+                  </a:lnTo>
+                  <a:lnTo>
+                    <a:pt x="6804139" y="171427"/>
+                  </a:lnTo>
+                  <a:lnTo>
+                    <a:pt x="6875762" y="81384"/>
+                  </a:lnTo>
+                  <a:lnTo>
+                    <a:pt x="6938785" y="0"/>
                   </a:lnTo>
                   <a:lnTo>
                     <a:pt x="7090630" y="0"/>
                   </a:lnTo>
                   <a:lnTo>
-                    <a:pt x="7090630" y="3469463"/>
-                  </a:lnTo>
-                  <a:lnTo>
-                    <a:pt x="7019007" y="3468387"/>
-                  </a:lnTo>
-                  <a:lnTo>
-                    <a:pt x="6947385" y="3467231"/>
-                  </a:lnTo>
-                  <a:lnTo>
-                    <a:pt x="6875762" y="3465988"/>
-                  </a:lnTo>
-                  <a:lnTo>
-                    <a:pt x="6804139" y="3464651"/>
-                  </a:lnTo>
-                  <a:lnTo>
-                    <a:pt x="6732517" y="3463214"/>
-                  </a:lnTo>
-                  <a:lnTo>
-                    <a:pt x="6660894" y="3461669"/>
-                  </a:lnTo>
-                  <a:lnTo>
-                    <a:pt x="6589272" y="3460007"/>
-                  </a:lnTo>
-                  <a:lnTo>
-                    <a:pt x="6517649" y="3458220"/>
-                  </a:lnTo>
-                  <a:lnTo>
-                    <a:pt x="6446027" y="3456298"/>
-                  </a:lnTo>
-                  <a:lnTo>
-                    <a:pt x="6374404" y="3454232"/>
-                  </a:lnTo>
-                  <a:lnTo>
-                    <a:pt x="6302782" y="3452010"/>
-                  </a:lnTo>
-                  <a:lnTo>
-                    <a:pt x="6231159" y="3449621"/>
-                  </a:lnTo>
-                  <a:lnTo>
-                    <a:pt x="6159537" y="3447053"/>
-                  </a:lnTo>
-                  <a:lnTo>
-                    <a:pt x="6087914" y="3444291"/>
-                  </a:lnTo>
-                  <a:lnTo>
-                    <a:pt x="6016292" y="3441320"/>
-                  </a:lnTo>
-                  <a:lnTo>
-                    <a:pt x="5944669" y="3438127"/>
-                  </a:lnTo>
-                  <a:lnTo>
-                    <a:pt x="5873047" y="3434693"/>
-                  </a:lnTo>
-                  <a:lnTo>
-                    <a:pt x="5801424" y="3431000"/>
-                  </a:lnTo>
-                  <a:lnTo>
-                    <a:pt x="5729802" y="3427030"/>
-                  </a:lnTo>
-                  <a:lnTo>
-                    <a:pt x="5658179" y="3422761"/>
-                  </a:lnTo>
-                  <a:lnTo>
-                    <a:pt x="5586557" y="3418170"/>
-                  </a:lnTo>
-                  <a:lnTo>
-                    <a:pt x="5514934" y="3413234"/>
-                  </a:lnTo>
-                  <a:lnTo>
-                    <a:pt x="5443311" y="3407926"/>
-                  </a:lnTo>
-                  <a:lnTo>
-                    <a:pt x="5371689" y="3402219"/>
-                  </a:lnTo>
-                  <a:lnTo>
-                    <a:pt x="5300066" y="3396082"/>
-                  </a:lnTo>
-                  <a:lnTo>
-                    <a:pt x="5228444" y="3389483"/>
-                  </a:lnTo>
-                  <a:lnTo>
-                    <a:pt x="5156821" y="3382387"/>
-                  </a:lnTo>
-                  <a:lnTo>
-                    <a:pt x="5085199" y="3374758"/>
-                  </a:lnTo>
-                  <a:lnTo>
-                    <a:pt x="5013576" y="3366554"/>
-                  </a:lnTo>
-                  <a:lnTo>
-                    <a:pt x="4941954" y="3357732"/>
-                  </a:lnTo>
-                  <a:lnTo>
-                    <a:pt x="4870331" y="3348246"/>
-                  </a:lnTo>
-                  <a:lnTo>
-                    <a:pt x="4798709" y="3338047"/>
-                  </a:lnTo>
-                  <a:lnTo>
-                    <a:pt x="4727086" y="3327079"/>
-                  </a:lnTo>
-                  <a:lnTo>
-                    <a:pt x="4655464" y="3315286"/>
-                  </a:lnTo>
-                  <a:lnTo>
-                    <a:pt x="4583841" y="3302605"/>
-                  </a:lnTo>
-                  <a:lnTo>
-                    <a:pt x="4512219" y="3288970"/>
-                  </a:lnTo>
-                  <a:lnTo>
-                    <a:pt x="4440596" y="3274309"/>
-                  </a:lnTo>
-                  <a:lnTo>
-                    <a:pt x="4368974" y="3258543"/>
-                  </a:lnTo>
-                  <a:lnTo>
-                    <a:pt x="4297351" y="3241591"/>
-                  </a:lnTo>
-                  <a:lnTo>
-                    <a:pt x="4225729" y="3223363"/>
-                  </a:lnTo>
-                  <a:lnTo>
-                    <a:pt x="4154106" y="3203763"/>
-                  </a:lnTo>
-                  <a:lnTo>
-                    <a:pt x="4082483" y="3182687"/>
-                  </a:lnTo>
-                  <a:lnTo>
-                    <a:pt x="4010861" y="3160025"/>
-                  </a:lnTo>
-                  <a:lnTo>
-                    <a:pt x="3939238" y="3135658"/>
-                  </a:lnTo>
-                  <a:lnTo>
-                    <a:pt x="3867616" y="3109455"/>
-                  </a:lnTo>
-                  <a:lnTo>
-                    <a:pt x="3795993" y="3081281"/>
-                  </a:lnTo>
-                  <a:lnTo>
-                    <a:pt x="3724371" y="3050986"/>
-                  </a:lnTo>
-                  <a:lnTo>
-                    <a:pt x="3652748" y="3018410"/>
-                  </a:lnTo>
-                  <a:lnTo>
-                    <a:pt x="3581126" y="2983382"/>
-                  </a:lnTo>
-                  <a:lnTo>
-                    <a:pt x="3509503" y="2945717"/>
-                  </a:lnTo>
-                  <a:lnTo>
-                    <a:pt x="3437881" y="2905218"/>
-                  </a:lnTo>
-                  <a:lnTo>
-                    <a:pt x="3366258" y="2861669"/>
-                  </a:lnTo>
-                  <a:lnTo>
-                    <a:pt x="3294636" y="2814843"/>
-                  </a:lnTo>
-                  <a:lnTo>
-                    <a:pt x="3223013" y="2764492"/>
-                  </a:lnTo>
-                  <a:lnTo>
-                    <a:pt x="3151391" y="2710350"/>
-                  </a:lnTo>
-                  <a:lnTo>
-                    <a:pt x="3079768" y="2655076"/>
-                  </a:lnTo>
-                  <a:lnTo>
-                    <a:pt x="3008146" y="2677001"/>
-                  </a:lnTo>
-                  <a:lnTo>
-                    <a:pt x="2936523" y="2698346"/>
-                  </a:lnTo>
-                  <a:lnTo>
-                    <a:pt x="2864901" y="2719126"/>
-                  </a:lnTo>
-                  <a:lnTo>
-                    <a:pt x="2793278" y="2739357"/>
-                  </a:lnTo>
-                  <a:lnTo>
-                    <a:pt x="2721655" y="2759052"/>
-                  </a:lnTo>
-                  <a:lnTo>
-                    <a:pt x="2650033" y="2778226"/>
-                  </a:lnTo>
-                  <a:lnTo>
-                    <a:pt x="2578410" y="2796893"/>
-                  </a:lnTo>
-                  <a:lnTo>
-                    <a:pt x="2506788" y="2815066"/>
-                  </a:lnTo>
-                  <a:lnTo>
-                    <a:pt x="2435165" y="2832758"/>
-                  </a:lnTo>
-                  <a:lnTo>
-                    <a:pt x="2363543" y="2849983"/>
-                  </a:lnTo>
-                  <a:lnTo>
-                    <a:pt x="2291920" y="2866751"/>
-                  </a:lnTo>
-                  <a:lnTo>
-                    <a:pt x="2220298" y="2883076"/>
-                  </a:lnTo>
-                  <a:lnTo>
-                    <a:pt x="2148675" y="2898968"/>
-                  </a:lnTo>
-                  <a:lnTo>
-                    <a:pt x="2077053" y="2914441"/>
-                  </a:lnTo>
-                  <a:lnTo>
-                    <a:pt x="2005430" y="2929503"/>
-                  </a:lnTo>
-                  <a:lnTo>
-                    <a:pt x="1933808" y="2944168"/>
-                  </a:lnTo>
-                  <a:lnTo>
-                    <a:pt x="1862185" y="2958444"/>
-                  </a:lnTo>
-                  <a:lnTo>
-                    <a:pt x="1790563" y="2972343"/>
-                  </a:lnTo>
-                  <a:lnTo>
-                    <a:pt x="1718940" y="2985874"/>
-                  </a:lnTo>
-                  <a:lnTo>
-                    <a:pt x="1647318" y="2999046"/>
-                  </a:lnTo>
-                  <a:lnTo>
-                    <a:pt x="1575695" y="3011871"/>
-                  </a:lnTo>
-                  <a:lnTo>
-                    <a:pt x="1504073" y="3024356"/>
-                  </a:lnTo>
-                  <a:lnTo>
-                    <a:pt x="1432450" y="3036511"/>
-                  </a:lnTo>
-                  <a:lnTo>
-                    <a:pt x="1360827" y="3048344"/>
-                  </a:lnTo>
-                  <a:lnTo>
-                    <a:pt x="1289205" y="3059864"/>
-                  </a:lnTo>
-                  <a:lnTo>
-                    <a:pt x="1217582" y="3071079"/>
-                  </a:lnTo>
-                  <a:lnTo>
-                    <a:pt x="1145960" y="3081997"/>
-                  </a:lnTo>
-                  <a:lnTo>
-                    <a:pt x="1074337" y="3092627"/>
-                  </a:lnTo>
-                  <a:lnTo>
-                    <a:pt x="1002715" y="3102975"/>
-                  </a:lnTo>
-                  <a:lnTo>
-                    <a:pt x="931092" y="3113050"/>
-                  </a:lnTo>
-                  <a:lnTo>
-                    <a:pt x="859470" y="3122858"/>
-                  </a:lnTo>
-                  <a:lnTo>
-                    <a:pt x="787847" y="3132406"/>
-                  </a:lnTo>
-                  <a:lnTo>
-                    <a:pt x="716225" y="3141702"/>
-                  </a:lnTo>
-                  <a:lnTo>
-                    <a:pt x="644602" y="3150752"/>
-                  </a:lnTo>
-                  <a:lnTo>
-                    <a:pt x="572980" y="3159563"/>
-                  </a:lnTo>
-                  <a:lnTo>
-                    <a:pt x="501357" y="3168140"/>
-                  </a:lnTo>
-                  <a:lnTo>
-                    <a:pt x="429735" y="3176490"/>
-                  </a:lnTo>
-                  <a:lnTo>
-                    <a:pt x="358112" y="3184620"/>
-                  </a:lnTo>
-                  <a:lnTo>
-                    <a:pt x="286490" y="3192534"/>
-                  </a:lnTo>
-                  <a:lnTo>
-                    <a:pt x="214867" y="3200239"/>
-                  </a:lnTo>
-                  <a:lnTo>
-                    <a:pt x="143245" y="3207740"/>
-                  </a:lnTo>
-                  <a:lnTo>
-                    <a:pt x="71622" y="3215043"/>
-                  </a:lnTo>
-                  <a:lnTo>
-                    <a:pt x="0" y="3222153"/>
+                    <a:pt x="7090630" y="3469120"/>
+                  </a:lnTo>
+                  <a:lnTo>
+                    <a:pt x="7019007" y="3468019"/>
+                  </a:lnTo>
+                  <a:lnTo>
+                    <a:pt x="6947385" y="3466835"/>
+                  </a:lnTo>
+                  <a:lnTo>
+                    <a:pt x="6875762" y="3465561"/>
+                  </a:lnTo>
+                  <a:lnTo>
+                    <a:pt x="6804139" y="3464192"/>
+                  </a:lnTo>
+                  <a:lnTo>
+                    <a:pt x="6732517" y="3462720"/>
+                  </a:lnTo>
+                  <a:lnTo>
+                    <a:pt x="6660894" y="3461137"/>
+                  </a:lnTo>
+                  <a:lnTo>
+                    <a:pt x="6589272" y="3459434"/>
+                  </a:lnTo>
+                  <a:lnTo>
+                    <a:pt x="6517649" y="3457604"/>
+                  </a:lnTo>
+                  <a:lnTo>
+                    <a:pt x="6446027" y="3455636"/>
+                  </a:lnTo>
+                  <a:lnTo>
+                    <a:pt x="6374404" y="3453519"/>
+                  </a:lnTo>
+                  <a:lnTo>
+                    <a:pt x="6302782" y="3451243"/>
+                  </a:lnTo>
+                  <a:lnTo>
+                    <a:pt x="6231159" y="3448796"/>
+                  </a:lnTo>
+                  <a:lnTo>
+                    <a:pt x="6159537" y="3446164"/>
+                  </a:lnTo>
+                  <a:lnTo>
+                    <a:pt x="6087914" y="3443335"/>
+                  </a:lnTo>
+                  <a:lnTo>
+                    <a:pt x="6016292" y="3440292"/>
+                  </a:lnTo>
+                  <a:lnTo>
+                    <a:pt x="5944669" y="3437020"/>
+                  </a:lnTo>
+                  <a:lnTo>
+                    <a:pt x="5873047" y="3433502"/>
+                  </a:lnTo>
+                  <a:lnTo>
+                    <a:pt x="5801424" y="3429719"/>
+                  </a:lnTo>
+                  <a:lnTo>
+                    <a:pt x="5729802" y="3425651"/>
+                  </a:lnTo>
+                  <a:lnTo>
+                    <a:pt x="5658179" y="3421277"/>
+                  </a:lnTo>
+                  <a:lnTo>
+                    <a:pt x="5586557" y="3416573"/>
+                  </a:lnTo>
+                  <a:lnTo>
+                    <a:pt x="5514934" y="3411515"/>
+                  </a:lnTo>
+                  <a:lnTo>
+                    <a:pt x="5443311" y="3406077"/>
+                  </a:lnTo>
+                  <a:lnTo>
+                    <a:pt x="5371689" y="3400229"/>
+                  </a:lnTo>
+                  <a:lnTo>
+                    <a:pt x="5300066" y="3393940"/>
+                  </a:lnTo>
+                  <a:lnTo>
+                    <a:pt x="5228444" y="3387179"/>
+                  </a:lnTo>
+                  <a:lnTo>
+                    <a:pt x="5156821" y="3379908"/>
+                  </a:lnTo>
+                  <a:lnTo>
+                    <a:pt x="5085199" y="3372089"/>
+                  </a:lnTo>
+                  <a:lnTo>
+                    <a:pt x="5013576" y="3363682"/>
+                  </a:lnTo>
+                  <a:lnTo>
+                    <a:pt x="4941954" y="3354642"/>
+                  </a:lnTo>
+                  <a:lnTo>
+                    <a:pt x="4870331" y="3344922"/>
+                  </a:lnTo>
+                  <a:lnTo>
+                    <a:pt x="4798709" y="3334469"/>
+                  </a:lnTo>
+                  <a:lnTo>
+                    <a:pt x="4727086" y="3323229"/>
+                  </a:lnTo>
+                  <a:lnTo>
+                    <a:pt x="4655464" y="3311144"/>
+                  </a:lnTo>
+                  <a:lnTo>
+                    <a:pt x="4583841" y="3298148"/>
+                  </a:lnTo>
+                  <a:lnTo>
+                    <a:pt x="4512219" y="3284173"/>
+                  </a:lnTo>
+                  <a:lnTo>
+                    <a:pt x="4440596" y="3269147"/>
+                  </a:lnTo>
+                  <a:lnTo>
+                    <a:pt x="4368974" y="3252989"/>
+                  </a:lnTo>
+                  <a:lnTo>
+                    <a:pt x="4297351" y="3235615"/>
+                  </a:lnTo>
+                  <a:lnTo>
+                    <a:pt x="4225729" y="3216932"/>
+                  </a:lnTo>
+                  <a:lnTo>
+                    <a:pt x="4154106" y="3196843"/>
+                  </a:lnTo>
+                  <a:lnTo>
+                    <a:pt x="4082483" y="3175241"/>
+                  </a:lnTo>
+                  <a:lnTo>
+                    <a:pt x="4010861" y="3152012"/>
+                  </a:lnTo>
+                  <a:lnTo>
+                    <a:pt x="3939238" y="3127035"/>
+                  </a:lnTo>
+                  <a:lnTo>
+                    <a:pt x="3867616" y="3100177"/>
+                  </a:lnTo>
+                  <a:lnTo>
+                    <a:pt x="3795993" y="3071297"/>
+                  </a:lnTo>
+                  <a:lnTo>
+                    <a:pt x="3724371" y="3040242"/>
+                  </a:lnTo>
+                  <a:lnTo>
+                    <a:pt x="3652748" y="3006849"/>
+                  </a:lnTo>
+                  <a:lnTo>
+                    <a:pt x="3581126" y="2970942"/>
+                  </a:lnTo>
+                  <a:lnTo>
+                    <a:pt x="3509503" y="2932331"/>
+                  </a:lnTo>
+                  <a:lnTo>
+                    <a:pt x="3437881" y="2890813"/>
+                  </a:lnTo>
+                  <a:lnTo>
+                    <a:pt x="3366258" y="2846170"/>
+                  </a:lnTo>
+                  <a:lnTo>
+                    <a:pt x="3294636" y="2798164"/>
+                  </a:lnTo>
+                  <a:lnTo>
+                    <a:pt x="3223013" y="2746545"/>
+                  </a:lnTo>
+                  <a:lnTo>
+                    <a:pt x="3151391" y="2691038"/>
+                  </a:lnTo>
+                  <a:lnTo>
+                    <a:pt x="3079768" y="2662598"/>
+                  </a:lnTo>
+                  <a:lnTo>
+                    <a:pt x="3008146" y="2684329"/>
+                  </a:lnTo>
+                  <a:lnTo>
+                    <a:pt x="2936523" y="2705486"/>
+                  </a:lnTo>
+                  <a:lnTo>
+                    <a:pt x="2864901" y="2726082"/>
+                  </a:lnTo>
+                  <a:lnTo>
+                    <a:pt x="2793278" y="2746133"/>
+                  </a:lnTo>
+                  <a:lnTo>
+                    <a:pt x="2721655" y="2765654"/>
+                  </a:lnTo>
+                  <a:lnTo>
+                    <a:pt x="2650033" y="2784658"/>
+                  </a:lnTo>
+                  <a:lnTo>
+                    <a:pt x="2578410" y="2803159"/>
+                  </a:lnTo>
+                  <a:lnTo>
+                    <a:pt x="2506788" y="2821171"/>
+                  </a:lnTo>
+                  <a:lnTo>
+                    <a:pt x="2435165" y="2838706"/>
+                  </a:lnTo>
+                  <a:lnTo>
+                    <a:pt x="2363543" y="2855776"/>
+                  </a:lnTo>
+                  <a:lnTo>
+                    <a:pt x="2291920" y="2872395"/>
+                  </a:lnTo>
+                  <a:lnTo>
+                    <a:pt x="2220298" y="2888575"/>
+                  </a:lnTo>
+                  <a:lnTo>
+                    <a:pt x="2148675" y="2904326"/>
+                  </a:lnTo>
+                  <a:lnTo>
+                    <a:pt x="2077053" y="2919660"/>
+                  </a:lnTo>
+                  <a:lnTo>
+                    <a:pt x="2005430" y="2934588"/>
+                  </a:lnTo>
+                  <a:lnTo>
+                    <a:pt x="1933808" y="2949122"/>
+                  </a:lnTo>
+                  <a:lnTo>
+                    <a:pt x="1862185" y="2963270"/>
+                  </a:lnTo>
+                  <a:lnTo>
+                    <a:pt x="1790563" y="2977044"/>
+                  </a:lnTo>
+                  <a:lnTo>
+                    <a:pt x="1718940" y="2990454"/>
+                  </a:lnTo>
+                  <a:lnTo>
+                    <a:pt x="1647318" y="3003509"/>
+                  </a:lnTo>
+                  <a:lnTo>
+                    <a:pt x="1575695" y="3016218"/>
+                  </a:lnTo>
+                  <a:lnTo>
+                    <a:pt x="1504073" y="3028591"/>
+                  </a:lnTo>
+                  <a:lnTo>
+                    <a:pt x="1432450" y="3040637"/>
+                  </a:lnTo>
+                  <a:lnTo>
+                    <a:pt x="1360827" y="3052364"/>
+                  </a:lnTo>
+                  <a:lnTo>
+                    <a:pt x="1289205" y="3063780"/>
+                  </a:lnTo>
+                  <a:lnTo>
+                    <a:pt x="1217582" y="3074894"/>
+                  </a:lnTo>
+                  <a:lnTo>
+                    <a:pt x="1145960" y="3085714"/>
+                  </a:lnTo>
+                  <a:lnTo>
+                    <a:pt x="1074337" y="3096248"/>
+                  </a:lnTo>
+                  <a:lnTo>
+                    <a:pt x="1002715" y="3106503"/>
+                  </a:lnTo>
+                  <a:lnTo>
+                    <a:pt x="931092" y="3116487"/>
+                  </a:lnTo>
+                  <a:lnTo>
+                    <a:pt x="859470" y="3126206"/>
+                  </a:lnTo>
+                  <a:lnTo>
+                    <a:pt x="787847" y="3135668"/>
+                  </a:lnTo>
+                  <a:lnTo>
+                    <a:pt x="716225" y="3144880"/>
+                  </a:lnTo>
+                  <a:lnTo>
+                    <a:pt x="644602" y="3153848"/>
+                  </a:lnTo>
+                  <a:lnTo>
+                    <a:pt x="572980" y="3162579"/>
+                  </a:lnTo>
+                  <a:lnTo>
+                    <a:pt x="501357" y="3171078"/>
+                  </a:lnTo>
+                  <a:lnTo>
+                    <a:pt x="429735" y="3179353"/>
+                  </a:lnTo>
+                  <a:lnTo>
+                    <a:pt x="358112" y="3187409"/>
+                  </a:lnTo>
+                  <a:lnTo>
+                    <a:pt x="286490" y="3195251"/>
+                  </a:lnTo>
+                  <a:lnTo>
+                    <a:pt x="214867" y="3202886"/>
+                  </a:lnTo>
+                  <a:lnTo>
+                    <a:pt x="143245" y="3210319"/>
+                  </a:lnTo>
+                  <a:lnTo>
+                    <a:pt x="71622" y="3217555"/>
+                  </a:lnTo>
+                  <a:lnTo>
+                    <a:pt x="0" y="3224600"/>
                   </a:lnTo>
                   <a:close/>
                 </a:path>
@@ -3948,237 +3948,237 @@
           </p:nvSpPr>
           <p:spPr>
             <a:xfrm>
-              <a:off x="2838642" y="2073503"/>
-              <a:ext cx="5248635" cy="2652133"/>
+              <a:off x="2863450" y="2073503"/>
+              <a:ext cx="5247383" cy="2640276"/>
             </a:xfrm>
             <a:custGeom>
               <a:avLst/>
               <a:pathLst>
-                <a:path w="5248635" h="2652133">
+                <a:path w="5247383" h="2640276">
                   <a:moveTo>
                     <a:pt x="0" y="0"/>
                   </a:moveTo>
                   <a:lnTo>
-                    <a:pt x="52347" y="181667"/>
-                  </a:lnTo>
-                  <a:lnTo>
-                    <a:pt x="123969" y="412828"/>
-                  </a:lnTo>
-                  <a:lnTo>
-                    <a:pt x="195592" y="627807"/>
-                  </a:lnTo>
-                  <a:lnTo>
-                    <a:pt x="267214" y="827736"/>
-                  </a:lnTo>
-                  <a:lnTo>
-                    <a:pt x="338837" y="1013670"/>
-                  </a:lnTo>
-                  <a:lnTo>
-                    <a:pt x="410459" y="1186587"/>
-                  </a:lnTo>
-                  <a:lnTo>
-                    <a:pt x="482082" y="1347399"/>
-                  </a:lnTo>
-                  <a:lnTo>
-                    <a:pt x="553704" y="1496953"/>
-                  </a:lnTo>
-                  <a:lnTo>
-                    <a:pt x="625327" y="1636038"/>
-                  </a:lnTo>
-                  <a:lnTo>
-                    <a:pt x="696949" y="1765387"/>
-                  </a:lnTo>
-                  <a:lnTo>
-                    <a:pt x="768572" y="1885680"/>
-                  </a:lnTo>
-                  <a:lnTo>
-                    <a:pt x="840194" y="1997552"/>
-                  </a:lnTo>
-                  <a:lnTo>
-                    <a:pt x="911817" y="2101593"/>
-                  </a:lnTo>
-                  <a:lnTo>
-                    <a:pt x="983439" y="2198350"/>
-                  </a:lnTo>
-                  <a:lnTo>
-                    <a:pt x="1055062" y="2288334"/>
-                  </a:lnTo>
-                  <a:lnTo>
-                    <a:pt x="1126684" y="2372019"/>
-                  </a:lnTo>
-                  <a:lnTo>
-                    <a:pt x="1198307" y="2449845"/>
-                  </a:lnTo>
-                  <a:lnTo>
-                    <a:pt x="1269930" y="2522223"/>
-                  </a:lnTo>
-                  <a:lnTo>
-                    <a:pt x="1341552" y="2589534"/>
-                  </a:lnTo>
-                  <a:lnTo>
-                    <a:pt x="1413175" y="2652133"/>
-                  </a:lnTo>
-                  <a:lnTo>
-                    <a:pt x="1484797" y="2632555"/>
-                  </a:lnTo>
-                  <a:lnTo>
-                    <a:pt x="1556420" y="2609421"/>
-                  </a:lnTo>
-                  <a:lnTo>
-                    <a:pt x="1628042" y="2585660"/>
-                  </a:lnTo>
-                  <a:lnTo>
-                    <a:pt x="1699665" y="2561252"/>
-                  </a:lnTo>
-                  <a:lnTo>
-                    <a:pt x="1771287" y="2536181"/>
-                  </a:lnTo>
-                  <a:lnTo>
-                    <a:pt x="1842910" y="2510428"/>
-                  </a:lnTo>
-                  <a:lnTo>
-                    <a:pt x="1914532" y="2483976"/>
-                  </a:lnTo>
-                  <a:lnTo>
-                    <a:pt x="1986155" y="2456805"/>
-                  </a:lnTo>
-                  <a:lnTo>
-                    <a:pt x="2057777" y="2428896"/>
-                  </a:lnTo>
-                  <a:lnTo>
-                    <a:pt x="2129400" y="2400227"/>
-                  </a:lnTo>
-                  <a:lnTo>
-                    <a:pt x="2201022" y="2370780"/>
-                  </a:lnTo>
-                  <a:lnTo>
-                    <a:pt x="2272645" y="2340533"/>
-                  </a:lnTo>
-                  <a:lnTo>
-                    <a:pt x="2344267" y="2309463"/>
-                  </a:lnTo>
-                  <a:lnTo>
-                    <a:pt x="2415890" y="2277549"/>
-                  </a:lnTo>
-                  <a:lnTo>
-                    <a:pt x="2487512" y="2244768"/>
-                  </a:lnTo>
-                  <a:lnTo>
-                    <a:pt x="2559135" y="2211096"/>
-                  </a:lnTo>
-                  <a:lnTo>
-                    <a:pt x="2630758" y="2176508"/>
-                  </a:lnTo>
-                  <a:lnTo>
-                    <a:pt x="2702380" y="2140981"/>
-                  </a:lnTo>
-                  <a:lnTo>
-                    <a:pt x="2774003" y="2104488"/>
-                  </a:lnTo>
-                  <a:lnTo>
-                    <a:pt x="2845625" y="2067004"/>
-                  </a:lnTo>
-                  <a:lnTo>
-                    <a:pt x="2917248" y="2028500"/>
-                  </a:lnTo>
-                  <a:lnTo>
-                    <a:pt x="2988870" y="1988950"/>
-                  </a:lnTo>
-                  <a:lnTo>
-                    <a:pt x="3060493" y="1948326"/>
-                  </a:lnTo>
-                  <a:lnTo>
-                    <a:pt x="3132115" y="1906597"/>
-                  </a:lnTo>
-                  <a:lnTo>
-                    <a:pt x="3203738" y="1863734"/>
-                  </a:lnTo>
-                  <a:lnTo>
-                    <a:pt x="3275360" y="1819706"/>
-                  </a:lnTo>
-                  <a:lnTo>
-                    <a:pt x="3346983" y="1774482"/>
-                  </a:lnTo>
-                  <a:lnTo>
-                    <a:pt x="3418605" y="1728029"/>
-                  </a:lnTo>
-                  <a:lnTo>
-                    <a:pt x="3490228" y="1680313"/>
-                  </a:lnTo>
-                  <a:lnTo>
-                    <a:pt x="3561850" y="1631300"/>
-                  </a:lnTo>
-                  <a:lnTo>
-                    <a:pt x="3633473" y="1580956"/>
-                  </a:lnTo>
-                  <a:lnTo>
-                    <a:pt x="3705095" y="1529243"/>
-                  </a:lnTo>
-                  <a:lnTo>
-                    <a:pt x="3776718" y="1476125"/>
-                  </a:lnTo>
-                  <a:lnTo>
-                    <a:pt x="3848340" y="1421563"/>
-                  </a:lnTo>
-                  <a:lnTo>
-                    <a:pt x="3919963" y="1365518"/>
-                  </a:lnTo>
-                  <a:lnTo>
-                    <a:pt x="3991586" y="1307950"/>
-                  </a:lnTo>
-                  <a:lnTo>
-                    <a:pt x="4063208" y="1248817"/>
-                  </a:lnTo>
-                  <a:lnTo>
-                    <a:pt x="4134831" y="1188078"/>
-                  </a:lnTo>
-                  <a:lnTo>
-                    <a:pt x="4206453" y="1125688"/>
-                  </a:lnTo>
-                  <a:lnTo>
-                    <a:pt x="4278076" y="1061602"/>
-                  </a:lnTo>
-                  <a:lnTo>
-                    <a:pt x="4349698" y="995774"/>
-                  </a:lnTo>
-                  <a:lnTo>
-                    <a:pt x="4421321" y="928158"/>
-                  </a:lnTo>
-                  <a:lnTo>
-                    <a:pt x="4492943" y="858703"/>
-                  </a:lnTo>
-                  <a:lnTo>
-                    <a:pt x="4564566" y="787361"/>
-                  </a:lnTo>
-                  <a:lnTo>
-                    <a:pt x="4636188" y="714081"/>
-                  </a:lnTo>
-                  <a:lnTo>
-                    <a:pt x="4707811" y="638808"/>
-                  </a:lnTo>
-                  <a:lnTo>
-                    <a:pt x="4779433" y="561490"/>
-                  </a:lnTo>
-                  <a:lnTo>
-                    <a:pt x="4851056" y="482071"/>
-                  </a:lnTo>
-                  <a:lnTo>
-                    <a:pt x="4922678" y="400494"/>
-                  </a:lnTo>
-                  <a:lnTo>
-                    <a:pt x="4994301" y="316699"/>
-                  </a:lnTo>
-                  <a:lnTo>
-                    <a:pt x="5065923" y="230627"/>
-                  </a:lnTo>
-                  <a:lnTo>
-                    <a:pt x="5137546" y="142215"/>
-                  </a:lnTo>
-                  <a:lnTo>
-                    <a:pt x="5209168" y="51401"/>
-                  </a:lnTo>
-                  <a:lnTo>
-                    <a:pt x="5248635" y="0"/>
+                    <a:pt x="27539" y="98019"/>
+                  </a:lnTo>
+                  <a:lnTo>
+                    <a:pt x="99161" y="335091"/>
+                  </a:lnTo>
+                  <a:lnTo>
+                    <a:pt x="170784" y="555564"/>
+                  </a:lnTo>
+                  <a:lnTo>
+                    <a:pt x="242406" y="760599"/>
+                  </a:lnTo>
+                  <a:lnTo>
+                    <a:pt x="314029" y="951277"/>
+                  </a:lnTo>
+                  <a:lnTo>
+                    <a:pt x="385651" y="1128603"/>
+                  </a:lnTo>
+                  <a:lnTo>
+                    <a:pt x="457274" y="1293513"/>
+                  </a:lnTo>
+                  <a:lnTo>
+                    <a:pt x="528896" y="1446876"/>
+                  </a:lnTo>
+                  <a:lnTo>
+                    <a:pt x="600519" y="1589500"/>
+                  </a:lnTo>
+                  <a:lnTo>
+                    <a:pt x="672142" y="1722137"/>
+                  </a:lnTo>
+                  <a:lnTo>
+                    <a:pt x="743764" y="1845487"/>
+                  </a:lnTo>
+                  <a:lnTo>
+                    <a:pt x="815387" y="1960200"/>
+                  </a:lnTo>
+                  <a:lnTo>
+                    <a:pt x="887009" y="2066880"/>
+                  </a:lnTo>
+                  <a:lnTo>
+                    <a:pt x="958632" y="2166091"/>
+                  </a:lnTo>
+                  <a:lnTo>
+                    <a:pt x="1030254" y="2258355"/>
+                  </a:lnTo>
+                  <a:lnTo>
+                    <a:pt x="1101877" y="2344158"/>
+                  </a:lnTo>
+                  <a:lnTo>
+                    <a:pt x="1173499" y="2423953"/>
+                  </a:lnTo>
+                  <a:lnTo>
+                    <a:pt x="1245122" y="2498161"/>
+                  </a:lnTo>
+                  <a:lnTo>
+                    <a:pt x="1316744" y="2567173"/>
+                  </a:lnTo>
+                  <a:lnTo>
+                    <a:pt x="1388367" y="2631353"/>
+                  </a:lnTo>
+                  <a:lnTo>
+                    <a:pt x="1459989" y="2640276"/>
+                  </a:lnTo>
+                  <a:lnTo>
+                    <a:pt x="1531612" y="2617347"/>
+                  </a:lnTo>
+                  <a:lnTo>
+                    <a:pt x="1603234" y="2593795"/>
+                  </a:lnTo>
+                  <a:lnTo>
+                    <a:pt x="1674857" y="2569602"/>
+                  </a:lnTo>
+                  <a:lnTo>
+                    <a:pt x="1746479" y="2544752"/>
+                  </a:lnTo>
+                  <a:lnTo>
+                    <a:pt x="1818102" y="2519226"/>
+                  </a:lnTo>
+                  <a:lnTo>
+                    <a:pt x="1889724" y="2493007"/>
+                  </a:lnTo>
+                  <a:lnTo>
+                    <a:pt x="1961347" y="2466074"/>
+                  </a:lnTo>
+                  <a:lnTo>
+                    <a:pt x="2032970" y="2438410"/>
+                  </a:lnTo>
+                  <a:lnTo>
+                    <a:pt x="2104592" y="2409993"/>
+                  </a:lnTo>
+                  <a:lnTo>
+                    <a:pt x="2176215" y="2380804"/>
+                  </a:lnTo>
+                  <a:lnTo>
+                    <a:pt x="2247837" y="2350822"/>
+                  </a:lnTo>
+                  <a:lnTo>
+                    <a:pt x="2319460" y="2320024"/>
+                  </a:lnTo>
+                  <a:lnTo>
+                    <a:pt x="2391082" y="2288389"/>
+                  </a:lnTo>
+                  <a:lnTo>
+                    <a:pt x="2462705" y="2255895"/>
+                  </a:lnTo>
+                  <a:lnTo>
+                    <a:pt x="2534327" y="2222517"/>
+                  </a:lnTo>
+                  <a:lnTo>
+                    <a:pt x="2605950" y="2188231"/>
+                  </a:lnTo>
+                  <a:lnTo>
+                    <a:pt x="2677572" y="2153014"/>
+                  </a:lnTo>
+                  <a:lnTo>
+                    <a:pt x="2749195" y="2116839"/>
+                  </a:lnTo>
+                  <a:lnTo>
+                    <a:pt x="2820817" y="2079681"/>
+                  </a:lnTo>
+                  <a:lnTo>
+                    <a:pt x="2892440" y="2041513"/>
+                  </a:lnTo>
+                  <a:lnTo>
+                    <a:pt x="2964062" y="2002307"/>
+                  </a:lnTo>
+                  <a:lnTo>
+                    <a:pt x="3035685" y="1962036"/>
+                  </a:lnTo>
+                  <a:lnTo>
+                    <a:pt x="3107307" y="1920669"/>
+                  </a:lnTo>
+                  <a:lnTo>
+                    <a:pt x="3178930" y="1878178"/>
+                  </a:lnTo>
+                  <a:lnTo>
+                    <a:pt x="3250552" y="1834533"/>
+                  </a:lnTo>
+                  <a:lnTo>
+                    <a:pt x="3322175" y="1789700"/>
+                  </a:lnTo>
+                  <a:lnTo>
+                    <a:pt x="3393798" y="1743649"/>
+                  </a:lnTo>
+                  <a:lnTo>
+                    <a:pt x="3465420" y="1696346"/>
+                  </a:lnTo>
+                  <a:lnTo>
+                    <a:pt x="3537043" y="1647757"/>
+                  </a:lnTo>
+                  <a:lnTo>
+                    <a:pt x="3608665" y="1597848"/>
+                  </a:lnTo>
+                  <a:lnTo>
+                    <a:pt x="3680288" y="1546581"/>
+                  </a:lnTo>
+                  <a:lnTo>
+                    <a:pt x="3751910" y="1493921"/>
+                  </a:lnTo>
+                  <a:lnTo>
+                    <a:pt x="3823533" y="1439830"/>
+                  </a:lnTo>
+                  <a:lnTo>
+                    <a:pt x="3895155" y="1384268"/>
+                  </a:lnTo>
+                  <a:lnTo>
+                    <a:pt x="3966778" y="1327195"/>
+                  </a:lnTo>
+                  <a:lnTo>
+                    <a:pt x="4038400" y="1268571"/>
+                  </a:lnTo>
+                  <a:lnTo>
+                    <a:pt x="4110023" y="1208354"/>
+                  </a:lnTo>
+                  <a:lnTo>
+                    <a:pt x="4181645" y="1146499"/>
+                  </a:lnTo>
+                  <a:lnTo>
+                    <a:pt x="4253268" y="1082963"/>
+                  </a:lnTo>
+                  <a:lnTo>
+                    <a:pt x="4324890" y="1017700"/>
+                  </a:lnTo>
+                  <a:lnTo>
+                    <a:pt x="4396513" y="950663"/>
+                  </a:lnTo>
+                  <a:lnTo>
+                    <a:pt x="4468135" y="881804"/>
+                  </a:lnTo>
+                  <a:lnTo>
+                    <a:pt x="4539758" y="811072"/>
+                  </a:lnTo>
+                  <a:lnTo>
+                    <a:pt x="4611380" y="738418"/>
+                  </a:lnTo>
+                  <a:lnTo>
+                    <a:pt x="4683003" y="663789"/>
+                  </a:lnTo>
+                  <a:lnTo>
+                    <a:pt x="4754626" y="587131"/>
+                  </a:lnTo>
+                  <a:lnTo>
+                    <a:pt x="4826248" y="508389"/>
+                  </a:lnTo>
+                  <a:lnTo>
+                    <a:pt x="4897871" y="427507"/>
+                  </a:lnTo>
+                  <a:lnTo>
+                    <a:pt x="4969493" y="344426"/>
+                  </a:lnTo>
+                  <a:lnTo>
+                    <a:pt x="5041116" y="259086"/>
+                  </a:lnTo>
+                  <a:lnTo>
+                    <a:pt x="5112738" y="171427"/>
+                  </a:lnTo>
+                  <a:lnTo>
+                    <a:pt x="5184361" y="81384"/>
+                  </a:lnTo>
+                  <a:lnTo>
+                    <a:pt x="5247383" y="0"/>
                   </a:lnTo>
                 </a:path>
               </a:pathLst>
@@ -4198,312 +4198,312 @@
           </p:nvSpPr>
           <p:spPr>
             <a:xfrm>
-              <a:off x="1172049" y="4728579"/>
-              <a:ext cx="7090630" cy="814386"/>
+              <a:off x="1172049" y="4736101"/>
+              <a:ext cx="7090630" cy="806522"/>
             </a:xfrm>
             <a:custGeom>
               <a:avLst/>
               <a:pathLst>
-                <a:path w="7090630" h="814386">
+                <a:path w="7090630" h="806522">
                   <a:moveTo>
-                    <a:pt x="7090630" y="814386"/>
+                    <a:pt x="7090630" y="806522"/>
                   </a:moveTo>
                   <a:lnTo>
-                    <a:pt x="7019007" y="813311"/>
-                  </a:lnTo>
-                  <a:lnTo>
-                    <a:pt x="6947385" y="812155"/>
-                  </a:lnTo>
-                  <a:lnTo>
-                    <a:pt x="6875762" y="810912"/>
-                  </a:lnTo>
-                  <a:lnTo>
-                    <a:pt x="6804139" y="809575"/>
-                  </a:lnTo>
-                  <a:lnTo>
-                    <a:pt x="6732517" y="808138"/>
-                  </a:lnTo>
-                  <a:lnTo>
-                    <a:pt x="6660894" y="806592"/>
-                  </a:lnTo>
-                  <a:lnTo>
-                    <a:pt x="6589272" y="804930"/>
-                  </a:lnTo>
-                  <a:lnTo>
-                    <a:pt x="6517649" y="803143"/>
-                  </a:lnTo>
-                  <a:lnTo>
-                    <a:pt x="6446027" y="801222"/>
-                  </a:lnTo>
-                  <a:lnTo>
-                    <a:pt x="6374404" y="799156"/>
-                  </a:lnTo>
-                  <a:lnTo>
-                    <a:pt x="6302782" y="796934"/>
-                  </a:lnTo>
-                  <a:lnTo>
-                    <a:pt x="6231159" y="794545"/>
-                  </a:lnTo>
-                  <a:lnTo>
-                    <a:pt x="6159537" y="791976"/>
-                  </a:lnTo>
-                  <a:lnTo>
-                    <a:pt x="6087914" y="789214"/>
-                  </a:lnTo>
-                  <a:lnTo>
-                    <a:pt x="6016292" y="786244"/>
-                  </a:lnTo>
-                  <a:lnTo>
-                    <a:pt x="5944669" y="783051"/>
-                  </a:lnTo>
-                  <a:lnTo>
-                    <a:pt x="5873047" y="779617"/>
-                  </a:lnTo>
-                  <a:lnTo>
-                    <a:pt x="5801424" y="775924"/>
-                  </a:lnTo>
-                  <a:lnTo>
-                    <a:pt x="5729802" y="771954"/>
-                  </a:lnTo>
-                  <a:lnTo>
-                    <a:pt x="5658179" y="767685"/>
-                  </a:lnTo>
-                  <a:lnTo>
-                    <a:pt x="5586557" y="763094"/>
-                  </a:lnTo>
-                  <a:lnTo>
-                    <a:pt x="5514934" y="758158"/>
-                  </a:lnTo>
-                  <a:lnTo>
-                    <a:pt x="5443311" y="752850"/>
-                  </a:lnTo>
-                  <a:lnTo>
-                    <a:pt x="5371689" y="747143"/>
-                  </a:lnTo>
-                  <a:lnTo>
-                    <a:pt x="5300066" y="741006"/>
-                  </a:lnTo>
-                  <a:lnTo>
-                    <a:pt x="5228444" y="734407"/>
-                  </a:lnTo>
-                  <a:lnTo>
-                    <a:pt x="5156821" y="727311"/>
-                  </a:lnTo>
-                  <a:lnTo>
-                    <a:pt x="5085199" y="719681"/>
-                  </a:lnTo>
-                  <a:lnTo>
-                    <a:pt x="5013576" y="711477"/>
-                  </a:lnTo>
-                  <a:lnTo>
-                    <a:pt x="4941954" y="702656"/>
-                  </a:lnTo>
-                  <a:lnTo>
-                    <a:pt x="4870331" y="693170"/>
-                  </a:lnTo>
-                  <a:lnTo>
-                    <a:pt x="4798709" y="682970"/>
-                  </a:lnTo>
-                  <a:lnTo>
-                    <a:pt x="4727086" y="672003"/>
-                  </a:lnTo>
-                  <a:lnTo>
-                    <a:pt x="4655464" y="660210"/>
-                  </a:lnTo>
-                  <a:lnTo>
-                    <a:pt x="4583841" y="647529"/>
-                  </a:lnTo>
-                  <a:lnTo>
-                    <a:pt x="4512219" y="633894"/>
-                  </a:lnTo>
-                  <a:lnTo>
-                    <a:pt x="4440596" y="619232"/>
-                  </a:lnTo>
-                  <a:lnTo>
-                    <a:pt x="4368974" y="603467"/>
-                  </a:lnTo>
-                  <a:lnTo>
-                    <a:pt x="4297351" y="586515"/>
-                  </a:lnTo>
-                  <a:lnTo>
-                    <a:pt x="4225729" y="568287"/>
-                  </a:lnTo>
-                  <a:lnTo>
-                    <a:pt x="4154106" y="548687"/>
-                  </a:lnTo>
-                  <a:lnTo>
-                    <a:pt x="4082483" y="527611"/>
-                  </a:lnTo>
-                  <a:lnTo>
-                    <a:pt x="4010861" y="504949"/>
-                  </a:lnTo>
-                  <a:lnTo>
-                    <a:pt x="3939238" y="480581"/>
-                  </a:lnTo>
-                  <a:lnTo>
-                    <a:pt x="3867616" y="454379"/>
-                  </a:lnTo>
-                  <a:lnTo>
-                    <a:pt x="3795993" y="426205"/>
-                  </a:lnTo>
-                  <a:lnTo>
-                    <a:pt x="3724371" y="395909"/>
-                  </a:lnTo>
-                  <a:lnTo>
-                    <a:pt x="3652748" y="363334"/>
-                  </a:lnTo>
-                  <a:lnTo>
-                    <a:pt x="3581126" y="328306"/>
-                  </a:lnTo>
-                  <a:lnTo>
-                    <a:pt x="3509503" y="290641"/>
-                  </a:lnTo>
-                  <a:lnTo>
-                    <a:pt x="3437881" y="250141"/>
-                  </a:lnTo>
-                  <a:lnTo>
-                    <a:pt x="3366258" y="206593"/>
-                  </a:lnTo>
-                  <a:lnTo>
-                    <a:pt x="3294636" y="159767"/>
-                  </a:lnTo>
-                  <a:lnTo>
-                    <a:pt x="3223013" y="109415"/>
-                  </a:lnTo>
-                  <a:lnTo>
-                    <a:pt x="3151391" y="55274"/>
+                    <a:pt x="7019007" y="805420"/>
+                  </a:lnTo>
+                  <a:lnTo>
+                    <a:pt x="6947385" y="804236"/>
+                  </a:lnTo>
+                  <a:lnTo>
+                    <a:pt x="6875762" y="802963"/>
+                  </a:lnTo>
+                  <a:lnTo>
+                    <a:pt x="6804139" y="801594"/>
+                  </a:lnTo>
+                  <a:lnTo>
+                    <a:pt x="6732517" y="800121"/>
+                  </a:lnTo>
+                  <a:lnTo>
+                    <a:pt x="6660894" y="798538"/>
+                  </a:lnTo>
+                  <a:lnTo>
+                    <a:pt x="6589272" y="796836"/>
+                  </a:lnTo>
+                  <a:lnTo>
+                    <a:pt x="6517649" y="795005"/>
+                  </a:lnTo>
+                  <a:lnTo>
+                    <a:pt x="6446027" y="793037"/>
+                  </a:lnTo>
+                  <a:lnTo>
+                    <a:pt x="6374404" y="790920"/>
+                  </a:lnTo>
+                  <a:lnTo>
+                    <a:pt x="6302782" y="788645"/>
+                  </a:lnTo>
+                  <a:lnTo>
+                    <a:pt x="6231159" y="786197"/>
+                  </a:lnTo>
+                  <a:lnTo>
+                    <a:pt x="6159537" y="783566"/>
+                  </a:lnTo>
+                  <a:lnTo>
+                    <a:pt x="6087914" y="780736"/>
+                  </a:lnTo>
+                  <a:lnTo>
+                    <a:pt x="6016292" y="777693"/>
+                  </a:lnTo>
+                  <a:lnTo>
+                    <a:pt x="5944669" y="774421"/>
+                  </a:lnTo>
+                  <a:lnTo>
+                    <a:pt x="5873047" y="770903"/>
+                  </a:lnTo>
+                  <a:lnTo>
+                    <a:pt x="5801424" y="767120"/>
+                  </a:lnTo>
+                  <a:lnTo>
+                    <a:pt x="5729802" y="763052"/>
+                  </a:lnTo>
+                  <a:lnTo>
+                    <a:pt x="5658179" y="758678"/>
+                  </a:lnTo>
+                  <a:lnTo>
+                    <a:pt x="5586557" y="753974"/>
+                  </a:lnTo>
+                  <a:lnTo>
+                    <a:pt x="5514934" y="748917"/>
+                  </a:lnTo>
+                  <a:lnTo>
+                    <a:pt x="5443311" y="743478"/>
+                  </a:lnTo>
+                  <a:lnTo>
+                    <a:pt x="5371689" y="737630"/>
+                  </a:lnTo>
+                  <a:lnTo>
+                    <a:pt x="5300066" y="731342"/>
+                  </a:lnTo>
+                  <a:lnTo>
+                    <a:pt x="5228444" y="724580"/>
+                  </a:lnTo>
+                  <a:lnTo>
+                    <a:pt x="5156821" y="717309"/>
+                  </a:lnTo>
+                  <a:lnTo>
+                    <a:pt x="5085199" y="709491"/>
+                  </a:lnTo>
+                  <a:lnTo>
+                    <a:pt x="5013576" y="701084"/>
+                  </a:lnTo>
+                  <a:lnTo>
+                    <a:pt x="4941954" y="692044"/>
+                  </a:lnTo>
+                  <a:lnTo>
+                    <a:pt x="4870331" y="682323"/>
+                  </a:lnTo>
+                  <a:lnTo>
+                    <a:pt x="4798709" y="671871"/>
+                  </a:lnTo>
+                  <a:lnTo>
+                    <a:pt x="4727086" y="660631"/>
+                  </a:lnTo>
+                  <a:lnTo>
+                    <a:pt x="4655464" y="648545"/>
+                  </a:lnTo>
+                  <a:lnTo>
+                    <a:pt x="4583841" y="635549"/>
+                  </a:lnTo>
+                  <a:lnTo>
+                    <a:pt x="4512219" y="621575"/>
+                  </a:lnTo>
+                  <a:lnTo>
+                    <a:pt x="4440596" y="606549"/>
+                  </a:lnTo>
+                  <a:lnTo>
+                    <a:pt x="4368974" y="590391"/>
+                  </a:lnTo>
+                  <a:lnTo>
+                    <a:pt x="4297351" y="573016"/>
+                  </a:lnTo>
+                  <a:lnTo>
+                    <a:pt x="4225729" y="554333"/>
+                  </a:lnTo>
+                  <a:lnTo>
+                    <a:pt x="4154106" y="534244"/>
+                  </a:lnTo>
+                  <a:lnTo>
+                    <a:pt x="4082483" y="512642"/>
+                  </a:lnTo>
+                  <a:lnTo>
+                    <a:pt x="4010861" y="489414"/>
+                  </a:lnTo>
+                  <a:lnTo>
+                    <a:pt x="3939238" y="464436"/>
+                  </a:lnTo>
+                  <a:lnTo>
+                    <a:pt x="3867616" y="437578"/>
+                  </a:lnTo>
+                  <a:lnTo>
+                    <a:pt x="3795993" y="408698"/>
+                  </a:lnTo>
+                  <a:lnTo>
+                    <a:pt x="3724371" y="377644"/>
+                  </a:lnTo>
+                  <a:lnTo>
+                    <a:pt x="3652748" y="344251"/>
+                  </a:lnTo>
+                  <a:lnTo>
+                    <a:pt x="3581126" y="308344"/>
+                  </a:lnTo>
+                  <a:lnTo>
+                    <a:pt x="3509503" y="269733"/>
+                  </a:lnTo>
+                  <a:lnTo>
+                    <a:pt x="3437881" y="228215"/>
+                  </a:lnTo>
+                  <a:lnTo>
+                    <a:pt x="3366258" y="183571"/>
+                  </a:lnTo>
+                  <a:lnTo>
+                    <a:pt x="3294636" y="135566"/>
+                  </a:lnTo>
+                  <a:lnTo>
+                    <a:pt x="3223013" y="83946"/>
+                  </a:lnTo>
+                  <a:lnTo>
+                    <a:pt x="3151391" y="28440"/>
                   </a:lnTo>
                   <a:lnTo>
                     <a:pt x="3079768" y="0"/>
                   </a:lnTo>
                   <a:lnTo>
-                    <a:pt x="3008146" y="21925"/>
-                  </a:lnTo>
-                  <a:lnTo>
-                    <a:pt x="2936523" y="43270"/>
-                  </a:lnTo>
-                  <a:lnTo>
-                    <a:pt x="2864901" y="64050"/>
-                  </a:lnTo>
-                  <a:lnTo>
-                    <a:pt x="2793278" y="84281"/>
-                  </a:lnTo>
-                  <a:lnTo>
-                    <a:pt x="2721655" y="103976"/>
-                  </a:lnTo>
-                  <a:lnTo>
-                    <a:pt x="2650033" y="123150"/>
-                  </a:lnTo>
-                  <a:lnTo>
-                    <a:pt x="2578410" y="141817"/>
-                  </a:lnTo>
-                  <a:lnTo>
-                    <a:pt x="2506788" y="159990"/>
-                  </a:lnTo>
-                  <a:lnTo>
-                    <a:pt x="2435165" y="177682"/>
-                  </a:lnTo>
-                  <a:lnTo>
-                    <a:pt x="2363543" y="194906"/>
-                  </a:lnTo>
-                  <a:lnTo>
-                    <a:pt x="2291920" y="211675"/>
-                  </a:lnTo>
-                  <a:lnTo>
-                    <a:pt x="2220298" y="227999"/>
-                  </a:lnTo>
-                  <a:lnTo>
-                    <a:pt x="2148675" y="243892"/>
-                  </a:lnTo>
-                  <a:lnTo>
-                    <a:pt x="2077053" y="259364"/>
-                  </a:lnTo>
-                  <a:lnTo>
-                    <a:pt x="2005430" y="274427"/>
-                  </a:lnTo>
-                  <a:lnTo>
-                    <a:pt x="1933808" y="289092"/>
-                  </a:lnTo>
-                  <a:lnTo>
-                    <a:pt x="1862185" y="303368"/>
-                  </a:lnTo>
-                  <a:lnTo>
-                    <a:pt x="1790563" y="317267"/>
-                  </a:lnTo>
-                  <a:lnTo>
-                    <a:pt x="1718940" y="330797"/>
-                  </a:lnTo>
-                  <a:lnTo>
-                    <a:pt x="1647318" y="343970"/>
-                  </a:lnTo>
-                  <a:lnTo>
-                    <a:pt x="1575695" y="356795"/>
-                  </a:lnTo>
-                  <a:lnTo>
-                    <a:pt x="1504073" y="369280"/>
-                  </a:lnTo>
-                  <a:lnTo>
-                    <a:pt x="1432450" y="381434"/>
-                  </a:lnTo>
-                  <a:lnTo>
-                    <a:pt x="1360827" y="393267"/>
-                  </a:lnTo>
-                  <a:lnTo>
-                    <a:pt x="1289205" y="404788"/>
-                  </a:lnTo>
-                  <a:lnTo>
-                    <a:pt x="1217582" y="416003"/>
-                  </a:lnTo>
-                  <a:lnTo>
-                    <a:pt x="1145960" y="426921"/>
-                  </a:lnTo>
-                  <a:lnTo>
-                    <a:pt x="1074337" y="437551"/>
-                  </a:lnTo>
-                  <a:lnTo>
-                    <a:pt x="1002715" y="447899"/>
-                  </a:lnTo>
-                  <a:lnTo>
-                    <a:pt x="931092" y="457974"/>
-                  </a:lnTo>
-                  <a:lnTo>
-                    <a:pt x="859470" y="467782"/>
-                  </a:lnTo>
-                  <a:lnTo>
-                    <a:pt x="787847" y="477330"/>
-                  </a:lnTo>
-                  <a:lnTo>
-                    <a:pt x="716225" y="486626"/>
-                  </a:lnTo>
-                  <a:lnTo>
-                    <a:pt x="644602" y="495676"/>
-                  </a:lnTo>
-                  <a:lnTo>
-                    <a:pt x="572980" y="504487"/>
-                  </a:lnTo>
-                  <a:lnTo>
-                    <a:pt x="501357" y="513064"/>
-                  </a:lnTo>
-                  <a:lnTo>
-                    <a:pt x="429735" y="521414"/>
-                  </a:lnTo>
-                  <a:lnTo>
-                    <a:pt x="358112" y="529544"/>
-                  </a:lnTo>
-                  <a:lnTo>
-                    <a:pt x="286490" y="537458"/>
-                  </a:lnTo>
-                  <a:lnTo>
-                    <a:pt x="214867" y="545163"/>
-                  </a:lnTo>
-                  <a:lnTo>
-                    <a:pt x="143245" y="552664"/>
-                  </a:lnTo>
-                  <a:lnTo>
-                    <a:pt x="71622" y="559967"/>
-                  </a:lnTo>
-                  <a:lnTo>
-                    <a:pt x="0" y="567076"/>
+                    <a:pt x="3008146" y="21731"/>
+                  </a:lnTo>
+                  <a:lnTo>
+                    <a:pt x="2936523" y="42887"/>
+                  </a:lnTo>
+                  <a:lnTo>
+                    <a:pt x="2864901" y="63484"/>
+                  </a:lnTo>
+                  <a:lnTo>
+                    <a:pt x="2793278" y="83535"/>
+                  </a:lnTo>
+                  <a:lnTo>
+                    <a:pt x="2721655" y="103056"/>
+                  </a:lnTo>
+                  <a:lnTo>
+                    <a:pt x="2650033" y="122060"/>
+                  </a:lnTo>
+                  <a:lnTo>
+                    <a:pt x="2578410" y="140561"/>
+                  </a:lnTo>
+                  <a:lnTo>
+                    <a:pt x="2506788" y="158572"/>
+                  </a:lnTo>
+                  <a:lnTo>
+                    <a:pt x="2435165" y="176107"/>
+                  </a:lnTo>
+                  <a:lnTo>
+                    <a:pt x="2363543" y="193178"/>
+                  </a:lnTo>
+                  <a:lnTo>
+                    <a:pt x="2291920" y="209797"/>
+                  </a:lnTo>
+                  <a:lnTo>
+                    <a:pt x="2220298" y="225976"/>
+                  </a:lnTo>
+                  <a:lnTo>
+                    <a:pt x="2148675" y="241727"/>
+                  </a:lnTo>
+                  <a:lnTo>
+                    <a:pt x="2077053" y="257061"/>
+                  </a:lnTo>
+                  <a:lnTo>
+                    <a:pt x="2005430" y="271990"/>
+                  </a:lnTo>
+                  <a:lnTo>
+                    <a:pt x="1933808" y="286523"/>
+                  </a:lnTo>
+                  <a:lnTo>
+                    <a:pt x="1862185" y="300672"/>
+                  </a:lnTo>
+                  <a:lnTo>
+                    <a:pt x="1790563" y="314446"/>
+                  </a:lnTo>
+                  <a:lnTo>
+                    <a:pt x="1718940" y="327856"/>
+                  </a:lnTo>
+                  <a:lnTo>
+                    <a:pt x="1647318" y="340910"/>
+                  </a:lnTo>
+                  <a:lnTo>
+                    <a:pt x="1575695" y="353620"/>
+                  </a:lnTo>
+                  <a:lnTo>
+                    <a:pt x="1504073" y="365993"/>
+                  </a:lnTo>
+                  <a:lnTo>
+                    <a:pt x="1432450" y="378038"/>
+                  </a:lnTo>
+                  <a:lnTo>
+                    <a:pt x="1360827" y="389765"/>
+                  </a:lnTo>
+                  <a:lnTo>
+                    <a:pt x="1289205" y="401181"/>
+                  </a:lnTo>
+                  <a:lnTo>
+                    <a:pt x="1217582" y="412296"/>
+                  </a:lnTo>
+                  <a:lnTo>
+                    <a:pt x="1145960" y="423116"/>
+                  </a:lnTo>
+                  <a:lnTo>
+                    <a:pt x="1074337" y="433650"/>
+                  </a:lnTo>
+                  <a:lnTo>
+                    <a:pt x="1002715" y="443905"/>
+                  </a:lnTo>
+                  <a:lnTo>
+                    <a:pt x="931092" y="453888"/>
+                  </a:lnTo>
+                  <a:lnTo>
+                    <a:pt x="859470" y="463608"/>
+                  </a:lnTo>
+                  <a:lnTo>
+                    <a:pt x="787847" y="473070"/>
+                  </a:lnTo>
+                  <a:lnTo>
+                    <a:pt x="716225" y="482282"/>
+                  </a:lnTo>
+                  <a:lnTo>
+                    <a:pt x="644602" y="491250"/>
+                  </a:lnTo>
+                  <a:lnTo>
+                    <a:pt x="572980" y="499980"/>
+                  </a:lnTo>
+                  <a:lnTo>
+                    <a:pt x="501357" y="508480"/>
+                  </a:lnTo>
+                  <a:lnTo>
+                    <a:pt x="429735" y="516755"/>
+                  </a:lnTo>
+                  <a:lnTo>
+                    <a:pt x="358112" y="524810"/>
+                  </a:lnTo>
+                  <a:lnTo>
+                    <a:pt x="286490" y="532653"/>
+                  </a:lnTo>
+                  <a:lnTo>
+                    <a:pt x="214867" y="540288"/>
+                  </a:lnTo>
+                  <a:lnTo>
+                    <a:pt x="143245" y="547720"/>
+                  </a:lnTo>
+                  <a:lnTo>
+                    <a:pt x="71622" y="554957"/>
+                  </a:lnTo>
+                  <a:lnTo>
+                    <a:pt x="0" y="562001"/>
                   </a:lnTo>
                 </a:path>
               </a:pathLst>
@@ -4523,312 +4523,312 @@
           </p:nvSpPr>
           <p:spPr>
             <a:xfrm>
-              <a:off x="1172049" y="3336811"/>
-              <a:ext cx="7090630" cy="1989931"/>
+              <a:off x="1172049" y="3318930"/>
+              <a:ext cx="7090630" cy="2006083"/>
             </a:xfrm>
             <a:custGeom>
               <a:avLst/>
               <a:pathLst>
-                <a:path w="7090630" h="1989931">
+                <a:path w="7090630" h="2006083">
                   <a:moveTo>
                     <a:pt x="0" y="0"/>
                   </a:moveTo>
                   <a:lnTo>
-                    <a:pt x="71622" y="50228"/>
-                  </a:lnTo>
-                  <a:lnTo>
-                    <a:pt x="143245" y="99320"/>
-                  </a:lnTo>
-                  <a:lnTo>
-                    <a:pt x="214867" y="147301"/>
-                  </a:lnTo>
-                  <a:lnTo>
-                    <a:pt x="286490" y="194197"/>
-                  </a:lnTo>
-                  <a:lnTo>
-                    <a:pt x="358112" y="240032"/>
-                  </a:lnTo>
-                  <a:lnTo>
-                    <a:pt x="429735" y="284831"/>
-                  </a:lnTo>
-                  <a:lnTo>
-                    <a:pt x="501357" y="328616"/>
-                  </a:lnTo>
-                  <a:lnTo>
-                    <a:pt x="572980" y="371410"/>
-                  </a:lnTo>
-                  <a:lnTo>
-                    <a:pt x="644602" y="413237"/>
-                  </a:lnTo>
-                  <a:lnTo>
-                    <a:pt x="716225" y="454117"/>
-                  </a:lnTo>
-                  <a:lnTo>
-                    <a:pt x="787847" y="494073"/>
-                  </a:lnTo>
-                  <a:lnTo>
-                    <a:pt x="859470" y="533124"/>
-                  </a:lnTo>
-                  <a:lnTo>
-                    <a:pt x="931092" y="571293"/>
-                  </a:lnTo>
-                  <a:lnTo>
-                    <a:pt x="1002715" y="608598"/>
-                  </a:lnTo>
-                  <a:lnTo>
-                    <a:pt x="1074337" y="645059"/>
-                  </a:lnTo>
-                  <a:lnTo>
-                    <a:pt x="1145960" y="680695"/>
-                  </a:lnTo>
-                  <a:lnTo>
-                    <a:pt x="1217582" y="715525"/>
-                  </a:lnTo>
-                  <a:lnTo>
-                    <a:pt x="1289205" y="749568"/>
-                  </a:lnTo>
-                  <a:lnTo>
-                    <a:pt x="1360827" y="782840"/>
-                  </a:lnTo>
-                  <a:lnTo>
-                    <a:pt x="1432450" y="815360"/>
-                  </a:lnTo>
-                  <a:lnTo>
-                    <a:pt x="1504073" y="847144"/>
-                  </a:lnTo>
-                  <a:lnTo>
-                    <a:pt x="1575695" y="878209"/>
-                  </a:lnTo>
-                  <a:lnTo>
-                    <a:pt x="1647318" y="908571"/>
-                  </a:lnTo>
-                  <a:lnTo>
-                    <a:pt x="1718940" y="938247"/>
-                  </a:lnTo>
-                  <a:lnTo>
-                    <a:pt x="1790563" y="967251"/>
-                  </a:lnTo>
-                  <a:lnTo>
-                    <a:pt x="1862185" y="995599"/>
-                  </a:lnTo>
-                  <a:lnTo>
-                    <a:pt x="1933808" y="1023306"/>
-                  </a:lnTo>
-                  <a:lnTo>
-                    <a:pt x="2005430" y="1050386"/>
-                  </a:lnTo>
-                  <a:lnTo>
-                    <a:pt x="2077053" y="1076853"/>
-                  </a:lnTo>
-                  <a:lnTo>
-                    <a:pt x="2148675" y="1102722"/>
-                  </a:lnTo>
-                  <a:lnTo>
-                    <a:pt x="2220298" y="1128006"/>
-                  </a:lnTo>
-                  <a:lnTo>
-                    <a:pt x="2291920" y="1152717"/>
-                  </a:lnTo>
-                  <a:lnTo>
-                    <a:pt x="2363543" y="1176870"/>
-                  </a:lnTo>
-                  <a:lnTo>
-                    <a:pt x="2435165" y="1200477"/>
-                  </a:lnTo>
-                  <a:lnTo>
-                    <a:pt x="2506788" y="1223549"/>
-                  </a:lnTo>
-                  <a:lnTo>
-                    <a:pt x="2578410" y="1246099"/>
-                  </a:lnTo>
-                  <a:lnTo>
-                    <a:pt x="2650033" y="1268140"/>
-                  </a:lnTo>
-                  <a:lnTo>
-                    <a:pt x="2721655" y="1289681"/>
-                  </a:lnTo>
-                  <a:lnTo>
-                    <a:pt x="2793278" y="1310736"/>
-                  </a:lnTo>
-                  <a:lnTo>
-                    <a:pt x="2864901" y="1331314"/>
-                  </a:lnTo>
-                  <a:lnTo>
-                    <a:pt x="2936523" y="1351427"/>
-                  </a:lnTo>
-                  <a:lnTo>
-                    <a:pt x="3008146" y="1371085"/>
-                  </a:lnTo>
-                  <a:lnTo>
-                    <a:pt x="3079768" y="1390298"/>
-                  </a:lnTo>
-                  <a:lnTo>
-                    <a:pt x="3151391" y="1409076"/>
-                  </a:lnTo>
-                  <a:lnTo>
-                    <a:pt x="3223013" y="1427430"/>
-                  </a:lnTo>
-                  <a:lnTo>
-                    <a:pt x="3294636" y="1445368"/>
-                  </a:lnTo>
-                  <a:lnTo>
-                    <a:pt x="3366258" y="1462901"/>
-                  </a:lnTo>
-                  <a:lnTo>
-                    <a:pt x="3437881" y="1480037"/>
-                  </a:lnTo>
-                  <a:lnTo>
-                    <a:pt x="3509503" y="1496785"/>
-                  </a:lnTo>
-                  <a:lnTo>
-                    <a:pt x="3581126" y="1513155"/>
-                  </a:lnTo>
-                  <a:lnTo>
-                    <a:pt x="3652748" y="1529154"/>
-                  </a:lnTo>
-                  <a:lnTo>
-                    <a:pt x="3724371" y="1544792"/>
-                  </a:lnTo>
-                  <a:lnTo>
-                    <a:pt x="3795993" y="1560075"/>
-                  </a:lnTo>
-                  <a:lnTo>
-                    <a:pt x="3867616" y="1575013"/>
-                  </a:lnTo>
-                  <a:lnTo>
-                    <a:pt x="3939238" y="1589613"/>
-                  </a:lnTo>
-                  <a:lnTo>
-                    <a:pt x="4010861" y="1603883"/>
-                  </a:lnTo>
-                  <a:lnTo>
-                    <a:pt x="4082483" y="1617830"/>
-                  </a:lnTo>
-                  <a:lnTo>
-                    <a:pt x="4154106" y="1631462"/>
-                  </a:lnTo>
-                  <a:lnTo>
-                    <a:pt x="4225729" y="1644785"/>
-                  </a:lnTo>
-                  <a:lnTo>
-                    <a:pt x="4297351" y="1657807"/>
-                  </a:lnTo>
-                  <a:lnTo>
-                    <a:pt x="4368974" y="1670534"/>
-                  </a:lnTo>
-                  <a:lnTo>
-                    <a:pt x="4440596" y="1682973"/>
-                  </a:lnTo>
-                  <a:lnTo>
-                    <a:pt x="4512219" y="1695131"/>
-                  </a:lnTo>
-                  <a:lnTo>
-                    <a:pt x="4583841" y="1707014"/>
-                  </a:lnTo>
-                  <a:lnTo>
-                    <a:pt x="4655464" y="1718628"/>
-                  </a:lnTo>
-                  <a:lnTo>
-                    <a:pt x="4727086" y="1729979"/>
-                  </a:lnTo>
-                  <a:lnTo>
-                    <a:pt x="4798709" y="1741074"/>
-                  </a:lnTo>
-                  <a:lnTo>
-                    <a:pt x="4870331" y="1751917"/>
-                  </a:lnTo>
-                  <a:lnTo>
-                    <a:pt x="4941954" y="1762516"/>
-                  </a:lnTo>
-                  <a:lnTo>
-                    <a:pt x="5013576" y="1772874"/>
-                  </a:lnTo>
-                  <a:lnTo>
-                    <a:pt x="5085199" y="1782999"/>
-                  </a:lnTo>
-                  <a:lnTo>
-                    <a:pt x="5156821" y="1792894"/>
-                  </a:lnTo>
-                  <a:lnTo>
-                    <a:pt x="5228444" y="1802565"/>
-                  </a:lnTo>
-                  <a:lnTo>
-                    <a:pt x="5300066" y="1812018"/>
-                  </a:lnTo>
-                  <a:lnTo>
-                    <a:pt x="5371689" y="1821257"/>
-                  </a:lnTo>
-                  <a:lnTo>
-                    <a:pt x="5443311" y="1830286"/>
-                  </a:lnTo>
-                  <a:lnTo>
-                    <a:pt x="5514934" y="1839112"/>
-                  </a:lnTo>
-                  <a:lnTo>
-                    <a:pt x="5586557" y="1847738"/>
-                  </a:lnTo>
-                  <a:lnTo>
-                    <a:pt x="5658179" y="1856169"/>
-                  </a:lnTo>
-                  <a:lnTo>
-                    <a:pt x="5729802" y="1864409"/>
-                  </a:lnTo>
-                  <a:lnTo>
-                    <a:pt x="5801424" y="1872462"/>
-                  </a:lnTo>
-                  <a:lnTo>
-                    <a:pt x="5873047" y="1880334"/>
-                  </a:lnTo>
-                  <a:lnTo>
-                    <a:pt x="5944669" y="1888027"/>
-                  </a:lnTo>
-                  <a:lnTo>
-                    <a:pt x="6016292" y="1895547"/>
-                  </a:lnTo>
-                  <a:lnTo>
-                    <a:pt x="6087914" y="1902896"/>
-                  </a:lnTo>
-                  <a:lnTo>
-                    <a:pt x="6159537" y="1910079"/>
-                  </a:lnTo>
-                  <a:lnTo>
-                    <a:pt x="6231159" y="1917100"/>
-                  </a:lnTo>
-                  <a:lnTo>
-                    <a:pt x="6302782" y="1923961"/>
-                  </a:lnTo>
-                  <a:lnTo>
-                    <a:pt x="6374404" y="1930668"/>
-                  </a:lnTo>
-                  <a:lnTo>
-                    <a:pt x="6446027" y="1937223"/>
-                  </a:lnTo>
-                  <a:lnTo>
-                    <a:pt x="6517649" y="1943629"/>
-                  </a:lnTo>
-                  <a:lnTo>
-                    <a:pt x="6589272" y="1949891"/>
-                  </a:lnTo>
-                  <a:lnTo>
-                    <a:pt x="6660894" y="1956011"/>
-                  </a:lnTo>
-                  <a:lnTo>
-                    <a:pt x="6732517" y="1961993"/>
-                  </a:lnTo>
-                  <a:lnTo>
-                    <a:pt x="6804139" y="1967839"/>
-                  </a:lnTo>
-                  <a:lnTo>
-                    <a:pt x="6875762" y="1973553"/>
-                  </a:lnTo>
-                  <a:lnTo>
-                    <a:pt x="6947385" y="1979138"/>
-                  </a:lnTo>
-                  <a:lnTo>
-                    <a:pt x="7019007" y="1984596"/>
-                  </a:lnTo>
-                  <a:lnTo>
-                    <a:pt x="7090630" y="1989931"/>
+                    <a:pt x="71622" y="50644"/>
+                  </a:lnTo>
+                  <a:lnTo>
+                    <a:pt x="143245" y="100143"/>
+                  </a:lnTo>
+                  <a:lnTo>
+                    <a:pt x="214867" y="148522"/>
+                  </a:lnTo>
+                  <a:lnTo>
+                    <a:pt x="286490" y="195806"/>
+                  </a:lnTo>
+                  <a:lnTo>
+                    <a:pt x="358112" y="242021"/>
+                  </a:lnTo>
+                  <a:lnTo>
+                    <a:pt x="429735" y="287189"/>
+                  </a:lnTo>
+                  <a:lnTo>
+                    <a:pt x="501357" y="331336"/>
+                  </a:lnTo>
+                  <a:lnTo>
+                    <a:pt x="572980" y="374484"/>
+                  </a:lnTo>
+                  <a:lnTo>
+                    <a:pt x="644602" y="416655"/>
+                  </a:lnTo>
+                  <a:lnTo>
+                    <a:pt x="716225" y="457873"/>
+                  </a:lnTo>
+                  <a:lnTo>
+                    <a:pt x="787847" y="498158"/>
+                  </a:lnTo>
+                  <a:lnTo>
+                    <a:pt x="859470" y="537531"/>
+                  </a:lnTo>
+                  <a:lnTo>
+                    <a:pt x="931092" y="576013"/>
+                  </a:lnTo>
+                  <a:lnTo>
+                    <a:pt x="1002715" y="613625"/>
+                  </a:lnTo>
+                  <a:lnTo>
+                    <a:pt x="1074337" y="650386"/>
+                  </a:lnTo>
+                  <a:lnTo>
+                    <a:pt x="1145960" y="686315"/>
+                  </a:lnTo>
+                  <a:lnTo>
+                    <a:pt x="1217582" y="721431"/>
+                  </a:lnTo>
+                  <a:lnTo>
+                    <a:pt x="1289205" y="755752"/>
+                  </a:lnTo>
+                  <a:lnTo>
+                    <a:pt x="1360827" y="789297"/>
+                  </a:lnTo>
+                  <a:lnTo>
+                    <a:pt x="1432450" y="822083"/>
+                  </a:lnTo>
+                  <a:lnTo>
+                    <a:pt x="1504073" y="854127"/>
+                  </a:lnTo>
+                  <a:lnTo>
+                    <a:pt x="1575695" y="885446"/>
+                  </a:lnTo>
+                  <a:lnTo>
+                    <a:pt x="1647318" y="916057"/>
+                  </a:lnTo>
+                  <a:lnTo>
+                    <a:pt x="1718940" y="945974"/>
+                  </a:lnTo>
+                  <a:lnTo>
+                    <a:pt x="1790563" y="975215"/>
+                  </a:lnTo>
+                  <a:lnTo>
+                    <a:pt x="1862185" y="1003795"/>
+                  </a:lnTo>
+                  <a:lnTo>
+                    <a:pt x="1933808" y="1031727"/>
+                  </a:lnTo>
+                  <a:lnTo>
+                    <a:pt x="2005430" y="1059028"/>
+                  </a:lnTo>
+                  <a:lnTo>
+                    <a:pt x="2077053" y="1085711"/>
+                  </a:lnTo>
+                  <a:lnTo>
+                    <a:pt x="2148675" y="1111790"/>
+                  </a:lnTo>
+                  <a:lnTo>
+                    <a:pt x="2220298" y="1137279"/>
+                  </a:lnTo>
+                  <a:lnTo>
+                    <a:pt x="2291920" y="1162192"/>
+                  </a:lnTo>
+                  <a:lnTo>
+                    <a:pt x="2363543" y="1186540"/>
+                  </a:lnTo>
+                  <a:lnTo>
+                    <a:pt x="2435165" y="1210338"/>
+                  </a:lnTo>
+                  <a:lnTo>
+                    <a:pt x="2506788" y="1233597"/>
+                  </a:lnTo>
+                  <a:lnTo>
+                    <a:pt x="2578410" y="1256330"/>
+                  </a:lnTo>
+                  <a:lnTo>
+                    <a:pt x="2650033" y="1278549"/>
+                  </a:lnTo>
+                  <a:lnTo>
+                    <a:pt x="2721655" y="1300265"/>
+                  </a:lnTo>
+                  <a:lnTo>
+                    <a:pt x="2793278" y="1321490"/>
+                  </a:lnTo>
+                  <a:lnTo>
+                    <a:pt x="2864901" y="1342234"/>
+                  </a:lnTo>
+                  <a:lnTo>
+                    <a:pt x="2936523" y="1362509"/>
+                  </a:lnTo>
+                  <a:lnTo>
+                    <a:pt x="3008146" y="1382325"/>
+                  </a:lnTo>
+                  <a:lnTo>
+                    <a:pt x="3079768" y="1401693"/>
+                  </a:lnTo>
+                  <a:lnTo>
+                    <a:pt x="3151391" y="1420623"/>
+                  </a:lnTo>
+                  <a:lnTo>
+                    <a:pt x="3223013" y="1439124"/>
+                  </a:lnTo>
+                  <a:lnTo>
+                    <a:pt x="3294636" y="1457207"/>
+                  </a:lnTo>
+                  <a:lnTo>
+                    <a:pt x="3366258" y="1474881"/>
+                  </a:lnTo>
+                  <a:lnTo>
+                    <a:pt x="3437881" y="1492155"/>
+                  </a:lnTo>
+                  <a:lnTo>
+                    <a:pt x="3509503" y="1509037"/>
+                  </a:lnTo>
+                  <a:lnTo>
+                    <a:pt x="3581126" y="1525538"/>
+                  </a:lnTo>
+                  <a:lnTo>
+                    <a:pt x="3652748" y="1541666"/>
+                  </a:lnTo>
+                  <a:lnTo>
+                    <a:pt x="3724371" y="1557428"/>
+                  </a:lnTo>
+                  <a:lnTo>
+                    <a:pt x="3795993" y="1572834"/>
+                  </a:lnTo>
+                  <a:lnTo>
+                    <a:pt x="3867616" y="1587892"/>
+                  </a:lnTo>
+                  <a:lnTo>
+                    <a:pt x="3939238" y="1602609"/>
+                  </a:lnTo>
+                  <a:lnTo>
+                    <a:pt x="4010861" y="1616992"/>
+                  </a:lnTo>
+                  <a:lnTo>
+                    <a:pt x="4082483" y="1631051"/>
+                  </a:lnTo>
+                  <a:lnTo>
+                    <a:pt x="4154106" y="1644791"/>
+                  </a:lnTo>
+                  <a:lnTo>
+                    <a:pt x="4225729" y="1658220"/>
+                  </a:lnTo>
+                  <a:lnTo>
+                    <a:pt x="4297351" y="1671346"/>
+                  </a:lnTo>
+                  <a:lnTo>
+                    <a:pt x="4368974" y="1684174"/>
+                  </a:lnTo>
+                  <a:lnTo>
+                    <a:pt x="4440596" y="1696712"/>
+                  </a:lnTo>
+                  <a:lnTo>
+                    <a:pt x="4512219" y="1708967"/>
+                  </a:lnTo>
+                  <a:lnTo>
+                    <a:pt x="4583841" y="1720944"/>
+                  </a:lnTo>
+                  <a:lnTo>
+                    <a:pt x="4655464" y="1732650"/>
+                  </a:lnTo>
+                  <a:lnTo>
+                    <a:pt x="4727086" y="1744092"/>
+                  </a:lnTo>
+                  <a:lnTo>
+                    <a:pt x="4798709" y="1755274"/>
+                  </a:lnTo>
+                  <a:lnTo>
+                    <a:pt x="4870331" y="1766204"/>
+                  </a:lnTo>
+                  <a:lnTo>
+                    <a:pt x="4941954" y="1776886"/>
+                  </a:lnTo>
+                  <a:lnTo>
+                    <a:pt x="5013576" y="1787326"/>
+                  </a:lnTo>
+                  <a:lnTo>
+                    <a:pt x="5085199" y="1797531"/>
+                  </a:lnTo>
+                  <a:lnTo>
+                    <a:pt x="5156821" y="1807504"/>
+                  </a:lnTo>
+                  <a:lnTo>
+                    <a:pt x="5228444" y="1817252"/>
+                  </a:lnTo>
+                  <a:lnTo>
+                    <a:pt x="5300066" y="1826779"/>
+                  </a:lnTo>
+                  <a:lnTo>
+                    <a:pt x="5371689" y="1836090"/>
+                  </a:lnTo>
+                  <a:lnTo>
+                    <a:pt x="5443311" y="1845191"/>
+                  </a:lnTo>
+                  <a:lnTo>
+                    <a:pt x="5514934" y="1854086"/>
+                  </a:lnTo>
+                  <a:lnTo>
+                    <a:pt x="5586557" y="1862780"/>
+                  </a:lnTo>
+                  <a:lnTo>
+                    <a:pt x="5658179" y="1871277"/>
+                  </a:lnTo>
+                  <a:lnTo>
+                    <a:pt x="5729802" y="1879582"/>
+                  </a:lnTo>
+                  <a:lnTo>
+                    <a:pt x="5801424" y="1887699"/>
+                  </a:lnTo>
+                  <a:lnTo>
+                    <a:pt x="5873047" y="1895632"/>
+                  </a:lnTo>
+                  <a:lnTo>
+                    <a:pt x="5944669" y="1903386"/>
+                  </a:lnTo>
+                  <a:lnTo>
+                    <a:pt x="6016292" y="1910964"/>
+                  </a:lnTo>
+                  <a:lnTo>
+                    <a:pt x="6087914" y="1918371"/>
+                  </a:lnTo>
+                  <a:lnTo>
+                    <a:pt x="6159537" y="1925610"/>
+                  </a:lnTo>
+                  <a:lnTo>
+                    <a:pt x="6231159" y="1932685"/>
+                  </a:lnTo>
+                  <a:lnTo>
+                    <a:pt x="6302782" y="1939601"/>
+                  </a:lnTo>
+                  <a:lnTo>
+                    <a:pt x="6374404" y="1946360"/>
+                  </a:lnTo>
+                  <a:lnTo>
+                    <a:pt x="6446027" y="1952965"/>
+                  </a:lnTo>
+                  <a:lnTo>
+                    <a:pt x="6517649" y="1959422"/>
+                  </a:lnTo>
+                  <a:lnTo>
+                    <a:pt x="6589272" y="1965732"/>
+                  </a:lnTo>
+                  <a:lnTo>
+                    <a:pt x="6660894" y="1971900"/>
+                  </a:lnTo>
+                  <a:lnTo>
+                    <a:pt x="6732517" y="1977928"/>
+                  </a:lnTo>
+                  <a:lnTo>
+                    <a:pt x="6804139" y="1983820"/>
+                  </a:lnTo>
+                  <a:lnTo>
+                    <a:pt x="6875762" y="1989578"/>
+                  </a:lnTo>
+                  <a:lnTo>
+                    <a:pt x="6947385" y="1995206"/>
+                  </a:lnTo>
+                  <a:lnTo>
+                    <a:pt x="7019007" y="2000707"/>
+                  </a:lnTo>
+                  <a:lnTo>
+                    <a:pt x="7090630" y="2006083"/>
                   </a:lnTo>
                 </a:path>
               </a:pathLst>
@@ -4900,7 +4900,7 @@
           </p:nvSpPr>
           <p:spPr>
             <a:xfrm>
-              <a:off x="4254372" y="2073503"/>
+              <a:off x="4278722" y="2073503"/>
               <a:ext cx="0" cy="3649639"/>
             </a:xfrm>
             <a:custGeom>
@@ -5173,7 +5173,7 @@
           </p:nvSpPr>
           <p:spPr>
             <a:xfrm>
-              <a:off x="1347083" y="5785772"/>
+              <a:off x="1347751" y="5785772"/>
               <a:ext cx="161574" cy="80101"/>
             </a:xfrm>
             <a:prstGeom prst="rect">
@@ -5219,7 +5219,7 @@
           </p:nvSpPr>
           <p:spPr>
             <a:xfrm>
-              <a:off x="2254916" y="5785772"/>
+              <a:off x="2255364" y="5785772"/>
               <a:ext cx="161574" cy="80101"/>
             </a:xfrm>
             <a:prstGeom prst="rect">
@@ -5265,7 +5265,7 @@
           </p:nvSpPr>
           <p:spPr>
             <a:xfrm>
-              <a:off x="3162750" y="5785772"/>
+              <a:off x="3162976" y="5785772"/>
               <a:ext cx="161574" cy="80101"/>
             </a:xfrm>
             <a:prstGeom prst="rect">
@@ -5311,7 +5311,7 @@
           </p:nvSpPr>
           <p:spPr>
             <a:xfrm>
-              <a:off x="4120281" y="5785772"/>
+              <a:off x="4120286" y="5785772"/>
               <a:ext cx="62179" cy="80101"/>
             </a:xfrm>
             <a:prstGeom prst="rect">
@@ -5357,7 +5357,7 @@
           </p:nvSpPr>
           <p:spPr>
             <a:xfrm>
-              <a:off x="4997024" y="5785772"/>
+              <a:off x="4996809" y="5785772"/>
               <a:ext cx="124358" cy="80101"/>
             </a:xfrm>
             <a:prstGeom prst="rect">
@@ -5403,7 +5403,7 @@
           </p:nvSpPr>
           <p:spPr>
             <a:xfrm>
-              <a:off x="5904858" y="5785772"/>
+              <a:off x="5904422" y="5785772"/>
               <a:ext cx="124358" cy="80101"/>
             </a:xfrm>
             <a:prstGeom prst="rect">
@@ -5449,7 +5449,7 @@
           </p:nvSpPr>
           <p:spPr>
             <a:xfrm>
-              <a:off x="6812691" y="5785772"/>
+              <a:off x="6812034" y="5785772"/>
               <a:ext cx="124358" cy="80101"/>
             </a:xfrm>
             <a:prstGeom prst="rect">
@@ -5495,7 +5495,7 @@
           </p:nvSpPr>
           <p:spPr>
             <a:xfrm>
-              <a:off x="7720525" y="5785772"/>
+              <a:off x="7719647" y="5785772"/>
               <a:ext cx="124358" cy="80101"/>
             </a:xfrm>
             <a:prstGeom prst="rect">
@@ -5666,7 +5666,7 @@
                   <a:latin typeface="Helvetica"/>
                   <a:cs typeface="Helvetica"/>
                 </a:rPr>
-                <a:t>subHR per 10 % decline: 1.34 (0.71-2.51), p_Bonf = 1.000 (n = 6)  |  per IQR decline (Δ = 26.4 %): 2.15 (0.41-11.39)  |  IQR: [-11.1, 15.3] %</a:t>
+                <a:t>subHR per 10 % decline: 1.34 (0.71-2.51), p_Bonf = 1.000 (n = 6)  |  per IQR decline (Δ = 26.4 %): 2.15 (0.41-11.35)  |  IQR: [-11.1, 15.4] %</a:t>
               </a:r>
             </a:p>
           </p:txBody>
